--- a/templates/posts/october/_templates/4-mentor.pptx
+++ b/templates/posts/october/_templates/4-mentor.pptx
@@ -5438,45 +5438,30 @@
           </a:p>
         </p:txBody>
       </p:sp>
-      <p:sp>
-        <p:nvSpPr>
-          <p:cNvPr id="39" name="TextBox 38"/>
-          <p:cNvSpPr txBox="1"/>
-          <p:nvPr/>
-        </p:nvSpPr>
+      <p:pic>
+        <p:nvPicPr>
+          <p:cNvPr id="39" name="Picture 38" descr="foundation-logo-color.png"/>
+          <p:cNvPicPr>
+            <a:picLocks noChangeAspect="1"/>
+          </p:cNvPicPr>
+          <p:nvPr/>
+        </p:nvPicPr>
+        <p:blipFill>
+          <a:blip r:embed="rId3"/>
+          <a:stretch>
+            <a:fillRect/>
+          </a:stretch>
+        </p:blipFill>
         <p:spPr>
           <a:xfrm rot="180000">
-            <a:off x="7264054" y="2150558"/>
-            <a:ext cx="1714500" cy="476250"/>
+            <a:off x="7597429" y="1917689"/>
+            <a:ext cx="1047750" cy="941987"/>
           </a:xfrm>
           <a:prstGeom prst="rect">
             <a:avLst/>
           </a:prstGeom>
-          <a:noFill/>
-        </p:spPr>
-        <p:txBody>
-          <a:bodyPr wrap="square" lIns="0" rIns="0" tIns="0" bIns="0" anchor="t">
-            <a:spAutoFit/>
-          </a:bodyPr>
-          <a:lstStyle/>
-          <a:p>
-            <a:pPr algn="ctr">
-              <a:lnSpc>
-                <a:spcPct val="120000"/>
-              </a:lnSpc>
-            </a:pPr>
-            <a:r>
-              <a:rPr sz="1800" b="1" i="0">
-                <a:solidFill>
-                  <a:srgbClr val="156826"/>
-                </a:solidFill>
-                <a:latin typeface="Montserrat"/>
-              </a:rPr>
-              <a:t>LOGO</a:t>
-            </a:r>
-          </a:p>
-        </p:txBody>
-      </p:sp>
+        </p:spPr>
+      </p:pic>
       <p:sp>
         <p:nvSpPr>
           <p:cNvPr id="40" name="TextBox 39"/>
@@ -6730,92 +6715,33 @@
           </a:p>
         </p:txBody>
       </p:sp>
-      <p:sp>
-        <p:nvSpPr>
-          <p:cNvPr id="9" name="Oval 8"/>
-          <p:cNvSpPr/>
-          <p:nvPr/>
-        </p:nvSpPr>
+      <p:pic>
+        <p:nvPicPr>
+          <p:cNvPr id="9" name="Picture 8" descr="foundation-logo-white.png"/>
+          <p:cNvPicPr>
+            <a:picLocks noChangeAspect="1"/>
+          </p:cNvPicPr>
+          <p:nvPr/>
+        </p:nvPicPr>
+        <p:blipFill>
+          <a:blip r:embed="rId3"/>
+          <a:stretch>
+            <a:fillRect/>
+          </a:stretch>
+        </p:blipFill>
         <p:spPr>
           <a:xfrm>
-            <a:off x="8667750" y="11239500"/>
-            <a:ext cx="857250" cy="857250"/>
-          </a:xfrm>
-          <a:prstGeom prst="ellipse">
-            <a:avLst/>
-          </a:prstGeom>
-          <a:noFill/>
-          <a:ln w="19050">
-            <a:solidFill>
-              <a:srgbClr val="F4F1EA"/>
-            </a:solidFill>
-          </a:ln>
-          <a:effectLst/>
-        </p:spPr>
-        <p:style>
-          <a:lnRef idx="1">
-            <a:schemeClr val="accent1"/>
-          </a:lnRef>
-          <a:fillRef idx="3">
-            <a:schemeClr val="accent1"/>
-          </a:fillRef>
-          <a:effectRef idx="2">
-            <a:schemeClr val="accent1"/>
-          </a:effectRef>
-          <a:fontRef idx="minor">
-            <a:schemeClr val="lt1"/>
-          </a:fontRef>
-        </p:style>
-        <p:txBody>
-          <a:bodyPr rtlCol="0" anchor="ctr"/>
-          <a:lstStyle/>
-          <a:p>
-            <a:pPr algn="ctr"/>
-          </a:p>
-        </p:txBody>
-      </p:sp>
+            <a:off x="8571501" y="11239500"/>
+            <a:ext cx="953498" cy="857250"/>
+          </a:xfrm>
+          <a:prstGeom prst="rect">
+            <a:avLst/>
+          </a:prstGeom>
+        </p:spPr>
+      </p:pic>
       <p:sp>
         <p:nvSpPr>
           <p:cNvPr id="10" name="TextBox 9"/>
-          <p:cNvSpPr txBox="1"/>
-          <p:nvPr/>
-        </p:nvSpPr>
-        <p:spPr>
-          <a:xfrm>
-            <a:off x="8667750" y="11239500"/>
-            <a:ext cx="857250" cy="857250"/>
-          </a:xfrm>
-          <a:prstGeom prst="rect">
-            <a:avLst/>
-          </a:prstGeom>
-          <a:noFill/>
-        </p:spPr>
-        <p:txBody>
-          <a:bodyPr wrap="square" lIns="0" rIns="0" tIns="0" bIns="0" anchor="ctr">
-            <a:spAutoFit/>
-          </a:bodyPr>
-          <a:lstStyle/>
-          <a:p>
-            <a:pPr algn="ctr">
-              <a:lnSpc>
-                <a:spcPct val="120000"/>
-              </a:lnSpc>
-            </a:pPr>
-            <a:r>
-              <a:rPr sz="1800" b="1" i="0">
-                <a:solidFill>
-                  <a:srgbClr val="F4F1EA"/>
-                </a:solidFill>
-                <a:latin typeface="Montserrat"/>
-              </a:rPr>
-              <a:t>LOGO</a:t>
-            </a:r>
-          </a:p>
-        </p:txBody>
-      </p:sp>
-      <p:sp>
-        <p:nvSpPr>
-          <p:cNvPr id="11" name="TextBox 10"/>
           <p:cNvSpPr txBox="1"/>
           <p:nvPr/>
         </p:nvSpPr>
@@ -7876,92 +7802,33 @@
           </a:p>
         </p:txBody>
       </p:sp>
-      <p:sp>
-        <p:nvSpPr>
-          <p:cNvPr id="12" name="Oval 11"/>
-          <p:cNvSpPr/>
-          <p:nvPr/>
-        </p:nvSpPr>
+      <p:pic>
+        <p:nvPicPr>
+          <p:cNvPr id="12" name="Picture 11" descr="foundation-logo-white.png"/>
+          <p:cNvPicPr>
+            <a:picLocks noChangeAspect="1"/>
+          </p:cNvPicPr>
+          <p:nvPr/>
+        </p:nvPicPr>
+        <p:blipFill>
+          <a:blip r:embed="rId3"/>
+          <a:stretch>
+            <a:fillRect/>
+          </a:stretch>
+        </p:blipFill>
         <p:spPr>
           <a:xfrm>
-            <a:off x="8667750" y="11239500"/>
-            <a:ext cx="857250" cy="857250"/>
-          </a:xfrm>
-          <a:prstGeom prst="ellipse">
-            <a:avLst/>
-          </a:prstGeom>
-          <a:noFill/>
-          <a:ln w="19050">
-            <a:solidFill>
-              <a:srgbClr val="F4F1EA"/>
-            </a:solidFill>
-          </a:ln>
-          <a:effectLst/>
-        </p:spPr>
-        <p:style>
-          <a:lnRef idx="1">
-            <a:schemeClr val="accent1"/>
-          </a:lnRef>
-          <a:fillRef idx="3">
-            <a:schemeClr val="accent1"/>
-          </a:fillRef>
-          <a:effectRef idx="2">
-            <a:schemeClr val="accent1"/>
-          </a:effectRef>
-          <a:fontRef idx="minor">
-            <a:schemeClr val="lt1"/>
-          </a:fontRef>
-        </p:style>
-        <p:txBody>
-          <a:bodyPr rtlCol="0" anchor="ctr"/>
-          <a:lstStyle/>
-          <a:p>
-            <a:pPr algn="ctr"/>
-          </a:p>
-        </p:txBody>
-      </p:sp>
+            <a:off x="8571501" y="11239500"/>
+            <a:ext cx="953498" cy="857250"/>
+          </a:xfrm>
+          <a:prstGeom prst="rect">
+            <a:avLst/>
+          </a:prstGeom>
+        </p:spPr>
+      </p:pic>
       <p:sp>
         <p:nvSpPr>
           <p:cNvPr id="13" name="TextBox 12"/>
-          <p:cNvSpPr txBox="1"/>
-          <p:nvPr/>
-        </p:nvSpPr>
-        <p:spPr>
-          <a:xfrm>
-            <a:off x="8667750" y="11239500"/>
-            <a:ext cx="857250" cy="857250"/>
-          </a:xfrm>
-          <a:prstGeom prst="rect">
-            <a:avLst/>
-          </a:prstGeom>
-          <a:noFill/>
-        </p:spPr>
-        <p:txBody>
-          <a:bodyPr wrap="square" lIns="0" rIns="0" tIns="0" bIns="0" anchor="ctr">
-            <a:spAutoFit/>
-          </a:bodyPr>
-          <a:lstStyle/>
-          <a:p>
-            <a:pPr algn="ctr">
-              <a:lnSpc>
-                <a:spcPct val="120000"/>
-              </a:lnSpc>
-            </a:pPr>
-            <a:r>
-              <a:rPr sz="1800" b="1" i="0">
-                <a:solidFill>
-                  <a:srgbClr val="F4F1EA"/>
-                </a:solidFill>
-                <a:latin typeface="Montserrat"/>
-              </a:rPr>
-              <a:t>LOGO</a:t>
-            </a:r>
-          </a:p>
-        </p:txBody>
-      </p:sp>
-      <p:sp>
-        <p:nvSpPr>
-          <p:cNvPr id="14" name="TextBox 13"/>
           <p:cNvSpPr txBox="1"/>
           <p:nvPr/>
         </p:nvSpPr>

--- a/templates/posts/october/_templates/4-mentor.pptx
+++ b/templates/posts/october/_templates/4-mentor.pptx
@@ -3788,7 +3788,7 @@
     <p:bg>
       <p:bgPr>
         <a:solidFill>
-          <a:srgbClr val="22371F"/>
+          <a:srgbClr val="1E3F1D"/>
         </a:solidFill>
         <a:effectLst/>
       </p:bgPr>
@@ -3821,7 +3821,7 @@
               <a:srgbClr val="E8E2D4"/>
             </a:fgClr>
             <a:bgClr>
-              <a:srgbClr val="F4F1EA"/>
+              <a:srgbClr val="F3F1EA"/>
             </a:bgClr>
           </a:pattFill>
           <a:ln>
@@ -3872,11 +3872,11 @@
             <a:avLst/>
           </a:prstGeom>
           <a:solidFill>
-            <a:srgbClr val="F4F1EA"/>
+            <a:srgbClr val="F3F1EA"/>
           </a:solidFill>
           <a:ln w="19050">
             <a:solidFill>
-              <a:srgbClr val="22371F"/>
+              <a:srgbClr val="1E3F1D"/>
             </a:solidFill>
           </a:ln>
           <a:effectLst/>
@@ -4001,7 +4001,7 @@
             <a:avLst/>
           </a:prstGeom>
           <a:solidFill>
-            <a:srgbClr val="156826"/>
+            <a:srgbClr val="31662F"/>
           </a:solidFill>
           <a:ln>
             <a:noFill/>
@@ -4045,7 +4045,7 @@
             <a:avLst/>
           </a:prstGeom>
           <a:solidFill>
-            <a:srgbClr val="156826"/>
+            <a:srgbClr val="31662F"/>
           </a:solidFill>
           <a:ln>
             <a:noFill/>
@@ -4089,7 +4089,7 @@
             <a:avLst/>
           </a:prstGeom>
           <a:solidFill>
-            <a:srgbClr val="156826"/>
+            <a:srgbClr val="31662F"/>
           </a:solidFill>
           <a:ln>
             <a:noFill/>
@@ -4133,7 +4133,7 @@
             <a:avLst/>
           </a:prstGeom>
           <a:solidFill>
-            <a:srgbClr val="156826"/>
+            <a:srgbClr val="31662F"/>
           </a:solidFill>
           <a:ln>
             <a:noFill/>
@@ -4177,7 +4177,7 @@
             <a:avLst/>
           </a:prstGeom>
           <a:solidFill>
-            <a:srgbClr val="156826"/>
+            <a:srgbClr val="31662F"/>
           </a:solidFill>
           <a:ln>
             <a:noFill/>
@@ -4221,7 +4221,7 @@
             <a:avLst/>
           </a:prstGeom>
           <a:solidFill>
-            <a:srgbClr val="156826"/>
+            <a:srgbClr val="31662F"/>
           </a:solidFill>
           <a:ln>
             <a:noFill/>
@@ -4265,7 +4265,7 @@
             <a:avLst/>
           </a:prstGeom>
           <a:solidFill>
-            <a:srgbClr val="156826"/>
+            <a:srgbClr val="31662F"/>
           </a:solidFill>
           <a:ln>
             <a:noFill/>
@@ -4309,7 +4309,7 @@
             <a:avLst/>
           </a:prstGeom>
           <a:solidFill>
-            <a:srgbClr val="156826"/>
+            <a:srgbClr val="31662F"/>
           </a:solidFill>
           <a:ln>
             <a:noFill/>
@@ -4353,7 +4353,7 @@
             <a:avLst/>
           </a:prstGeom>
           <a:solidFill>
-            <a:srgbClr val="156826"/>
+            <a:srgbClr val="31662F"/>
           </a:solidFill>
           <a:ln>
             <a:noFill/>
@@ -4397,7 +4397,7 @@
             <a:avLst/>
           </a:prstGeom>
           <a:solidFill>
-            <a:srgbClr val="156826"/>
+            <a:srgbClr val="31662F"/>
           </a:solidFill>
           <a:ln>
             <a:noFill/>
@@ -4441,7 +4441,7 @@
             <a:avLst/>
           </a:prstGeom>
           <a:solidFill>
-            <a:srgbClr val="156826"/>
+            <a:srgbClr val="31662F"/>
           </a:solidFill>
           <a:ln>
             <a:noFill/>
@@ -4485,7 +4485,7 @@
             <a:avLst/>
           </a:prstGeom>
           <a:solidFill>
-            <a:srgbClr val="156826"/>
+            <a:srgbClr val="31662F"/>
           </a:solidFill>
           <a:ln>
             <a:noFill/>
@@ -4529,7 +4529,7 @@
             <a:avLst/>
           </a:prstGeom>
           <a:solidFill>
-            <a:srgbClr val="156826"/>
+            <a:srgbClr val="31662F"/>
           </a:solidFill>
           <a:ln>
             <a:noFill/>
@@ -4573,7 +4573,7 @@
             <a:avLst/>
           </a:prstGeom>
           <a:solidFill>
-            <a:srgbClr val="156826"/>
+            <a:srgbClr val="31662F"/>
           </a:solidFill>
           <a:ln>
             <a:noFill/>
@@ -4617,7 +4617,7 @@
             <a:avLst/>
           </a:prstGeom>
           <a:solidFill>
-            <a:srgbClr val="156826"/>
+            <a:srgbClr val="31662F"/>
           </a:solidFill>
           <a:ln>
             <a:noFill/>
@@ -4661,7 +4661,7 @@
             <a:avLst/>
           </a:prstGeom>
           <a:solidFill>
-            <a:srgbClr val="156826"/>
+            <a:srgbClr val="31662F"/>
           </a:solidFill>
           <a:ln>
             <a:noFill/>
@@ -4705,7 +4705,7 @@
             <a:avLst/>
           </a:prstGeom>
           <a:solidFill>
-            <a:srgbClr val="F4F1EA"/>
+            <a:srgbClr val="F3F1EA"/>
           </a:solidFill>
           <a:ln>
             <a:noFill/>
@@ -4749,7 +4749,7 @@
             <a:avLst/>
           </a:prstGeom>
           <a:solidFill>
-            <a:srgbClr val="F4F1EA"/>
+            <a:srgbClr val="F3F1EA"/>
           </a:solidFill>
           <a:ln>
             <a:noFill/>
@@ -4793,7 +4793,7 @@
             <a:avLst/>
           </a:prstGeom>
           <a:solidFill>
-            <a:srgbClr val="F4F1EA"/>
+            <a:srgbClr val="F3F1EA"/>
           </a:solidFill>
           <a:ln>
             <a:noFill/>
@@ -4837,7 +4837,7 @@
             <a:avLst/>
           </a:prstGeom>
           <a:solidFill>
-            <a:srgbClr val="F4F1EA"/>
+            <a:srgbClr val="F3F1EA"/>
           </a:solidFill>
           <a:ln>
             <a:noFill/>
@@ -4881,7 +4881,7 @@
             <a:avLst/>
           </a:prstGeom>
           <a:solidFill>
-            <a:srgbClr val="F4F1EA"/>
+            <a:srgbClr val="F3F1EA"/>
           </a:solidFill>
           <a:ln>
             <a:noFill/>
@@ -4925,7 +4925,7 @@
             <a:avLst/>
           </a:prstGeom>
           <a:solidFill>
-            <a:srgbClr val="F4F1EA"/>
+            <a:srgbClr val="F3F1EA"/>
           </a:solidFill>
           <a:ln>
             <a:noFill/>
@@ -4969,7 +4969,7 @@
             <a:avLst/>
           </a:prstGeom>
           <a:solidFill>
-            <a:srgbClr val="F4F1EA"/>
+            <a:srgbClr val="F3F1EA"/>
           </a:solidFill>
           <a:ln>
             <a:noFill/>
@@ -5013,7 +5013,7 @@
             <a:avLst/>
           </a:prstGeom>
           <a:solidFill>
-            <a:srgbClr val="F4F1EA"/>
+            <a:srgbClr val="F3F1EA"/>
           </a:solidFill>
           <a:ln>
             <a:noFill/>
@@ -5057,7 +5057,7 @@
             <a:avLst/>
           </a:prstGeom>
           <a:solidFill>
-            <a:srgbClr val="F4F1EA"/>
+            <a:srgbClr val="F3F1EA"/>
           </a:solidFill>
           <a:ln>
             <a:noFill/>
@@ -5101,7 +5101,7 @@
             <a:avLst/>
           </a:prstGeom>
           <a:solidFill>
-            <a:srgbClr val="F4F1EA"/>
+            <a:srgbClr val="F3F1EA"/>
           </a:solidFill>
           <a:ln>
             <a:noFill/>
@@ -5145,7 +5145,7 @@
             <a:avLst/>
           </a:prstGeom>
           <a:solidFill>
-            <a:srgbClr val="F4F1EA"/>
+            <a:srgbClr val="F3F1EA"/>
           </a:solidFill>
           <a:ln>
             <a:noFill/>
@@ -5189,7 +5189,7 @@
             <a:avLst/>
           </a:prstGeom>
           <a:solidFill>
-            <a:srgbClr val="F4F1EA"/>
+            <a:srgbClr val="F3F1EA"/>
           </a:solidFill>
           <a:ln>
             <a:noFill/>
@@ -5233,7 +5233,7 @@
             <a:avLst/>
           </a:prstGeom>
           <a:solidFill>
-            <a:srgbClr val="F4F1EA"/>
+            <a:srgbClr val="F3F1EA"/>
           </a:solidFill>
           <a:ln>
             <a:noFill/>
@@ -5277,7 +5277,7 @@
             <a:avLst/>
           </a:prstGeom>
           <a:solidFill>
-            <a:srgbClr val="F4F1EA"/>
+            <a:srgbClr val="F3F1EA"/>
           </a:solidFill>
           <a:ln>
             <a:noFill/>
@@ -5321,7 +5321,7 @@
             <a:avLst/>
           </a:prstGeom>
           <a:solidFill>
-            <a:srgbClr val="F4F1EA"/>
+            <a:srgbClr val="F3F1EA"/>
           </a:solidFill>
           <a:ln>
             <a:noFill/>
@@ -5365,7 +5365,7 @@
             <a:avLst/>
           </a:prstGeom>
           <a:solidFill>
-            <a:srgbClr val="F4F1EA"/>
+            <a:srgbClr val="F3F1EA"/>
           </a:solidFill>
           <a:ln>
             <a:noFill/>
@@ -5409,7 +5409,7 @@
             <a:avLst/>
           </a:prstGeom>
           <a:solidFill>
-            <a:srgbClr val="F4F1EA"/>
+            <a:srgbClr val="F3F1EA"/>
           </a:solidFill>
           <a:ln>
             <a:noFill/>
@@ -5492,7 +5492,7 @@
             <a:r>
               <a:rPr sz="2000" b="1" i="0" spc="200">
                 <a:solidFill>
-                  <a:srgbClr val="156826"/>
+                  <a:srgbClr val="31662F"/>
                 </a:solidFill>
                 <a:latin typeface="Montserrat"/>
               </a:rPr>
@@ -5570,7 +5570,7 @@
             <a:r>
               <a:rPr sz="2000" b="1" i="0" spc="200">
                 <a:solidFill>
-                  <a:srgbClr val="156826"/>
+                  <a:srgbClr val="31662F"/>
                 </a:solidFill>
                 <a:latin typeface="Montserrat"/>
               </a:rPr>
@@ -5648,7 +5648,7 @@
             <a:r>
               <a:rPr sz="2000" b="1" i="0" spc="200">
                 <a:solidFill>
-                  <a:srgbClr val="156826"/>
+                  <a:srgbClr val="31662F"/>
                 </a:solidFill>
                 <a:latin typeface="Montserrat"/>
               </a:rPr>
@@ -5726,7 +5726,7 @@
             <a:r>
               <a:rPr sz="2000" b="1" i="0" spc="200">
                 <a:solidFill>
-                  <a:srgbClr val="156826"/>
+                  <a:srgbClr val="31662F"/>
                 </a:solidFill>
                 <a:latin typeface="Montserrat"/>
               </a:rPr>
@@ -5816,7 +5816,7 @@
             </a:pathLst>
           </a:custGeom>
           <a:solidFill>
-            <a:srgbClr val="156826"/>
+            <a:srgbClr val="31662F"/>
           </a:solidFill>
           <a:ln>
             <a:noFill/>
@@ -5875,7 +5875,7 @@
             <a:r>
               <a:rPr sz="5000" b="1" i="0">
                 <a:solidFill>
-                  <a:srgbClr val="F4F1EA"/>
+                  <a:srgbClr val="F3F1EA"/>
                 </a:solidFill>
                 <a:latin typeface="Montserrat"/>
               </a:rPr>
@@ -5926,7 +5926,7 @@
             </a:pathLst>
           </a:custGeom>
           <a:solidFill>
-            <a:srgbClr val="22371F"/>
+            <a:srgbClr val="1E3F1D"/>
           </a:solidFill>
           <a:ln>
             <a:noFill/>
@@ -5985,7 +5985,7 @@
             <a:r>
               <a:rPr sz="2800" b="0" i="0">
                 <a:solidFill>
-                  <a:srgbClr val="DBE6A7"/>
+                  <a:srgbClr val="B1BCB1"/>
                 </a:solidFill>
                 <a:latin typeface="Source Sans 3"/>
               </a:rPr>
@@ -6009,7 +6009,7 @@
             <a:avLst/>
           </a:prstGeom>
           <a:solidFill>
-            <a:srgbClr val="4F3433"/>
+            <a:srgbClr val="4C3634"/>
           </a:solidFill>
           <a:ln>
             <a:noFill/>
@@ -6068,7 +6068,7 @@
             <a:r>
               <a:rPr sz="1800" b="0" i="0">
                 <a:solidFill>
-                  <a:srgbClr val="F4F1EA"/>
+                  <a:srgbClr val="F3F1EA"/>
                 </a:solidFill>
                 <a:latin typeface="Source Sans 3"/>
               </a:rPr>
@@ -6107,7 +6107,7 @@
             <a:r>
               <a:rPr sz="2000" b="0" i="0">
                 <a:solidFill>
-                  <a:srgbClr val="F4F1EA">
+                  <a:srgbClr val="F3F1EA">
                     <a:alpha val="60000"/>
                   </a:srgbClr>
                 </a:solidFill>
@@ -6132,7 +6132,7 @@
     <p:bg>
       <p:bgPr>
         <a:solidFill>
-          <a:srgbClr val="22371F"/>
+          <a:srgbClr val="1E3F1D"/>
         </a:solidFill>
         <a:effectLst/>
       </p:bgPr>
@@ -6174,7 +6174,7 @@
             <a:r>
               <a:rPr sz="6400" b="1" i="0">
                 <a:solidFill>
-                  <a:srgbClr val="F4F1EA"/>
+                  <a:srgbClr val="F3F1EA"/>
                 </a:solidFill>
                 <a:latin typeface="Montserrat"/>
               </a:rPr>
@@ -6204,7 +6204,7 @@
               <a:srgbClr val="E8E2D4"/>
             </a:fgClr>
             <a:bgClr>
-              <a:srgbClr val="F4F1EA"/>
+              <a:srgbClr val="F3F1EA"/>
             </a:bgClr>
           </a:pattFill>
           <a:ln>
@@ -6261,7 +6261,7 @@
               <a:srgbClr val="E8E2D4"/>
             </a:fgClr>
             <a:bgClr>
-              <a:srgbClr val="F4F1EA"/>
+              <a:srgbClr val="F3F1EA"/>
             </a:bgClr>
           </a:pattFill>
           <a:ln>
@@ -6318,7 +6318,7 @@
               <a:srgbClr val="E8E2D4"/>
             </a:fgClr>
             <a:bgClr>
-              <a:srgbClr val="F4F1EA"/>
+              <a:srgbClr val="F3F1EA"/>
             </a:bgClr>
           </a:pattFill>
           <a:ln>
@@ -6384,7 +6384,7 @@
             <a:r>
               <a:rPr sz="2000" b="0" i="0">
                 <a:solidFill>
-                  <a:srgbClr val="F4F1EA">
+                  <a:srgbClr val="F3F1EA">
                     <a:alpha val="60000"/>
                   </a:srgbClr>
                 </a:solidFill>
@@ -6409,7 +6409,7 @@
     <p:bg>
       <p:bgPr>
         <a:solidFill>
-          <a:srgbClr val="22371F"/>
+          <a:srgbClr val="1E3F1D"/>
         </a:solidFill>
         <a:effectLst/>
       </p:bgPr>
@@ -6521,7 +6521,7 @@
             </a:avLst>
           </a:prstGeom>
           <a:solidFill>
-            <a:srgbClr val="22371F">
+            <a:srgbClr val="1E3F1D">
               <a:alpha val="90000"/>
             </a:srgbClr>
           </a:solidFill>
@@ -6582,7 +6582,7 @@
             <a:r>
               <a:rPr sz="2200" b="1" i="0" spc="200">
                 <a:solidFill>
-                  <a:srgbClr val="DBE6A7"/>
+                  <a:srgbClr val="B1BCB1"/>
                 </a:solidFill>
                 <a:latin typeface="Montserrat"/>
               </a:rPr>
@@ -6606,7 +6606,7 @@
             <a:avLst/>
           </a:prstGeom>
           <a:solidFill>
-            <a:srgbClr val="22371F">
+            <a:srgbClr val="1E3F1D">
               <a:alpha val="90000"/>
             </a:srgbClr>
           </a:solidFill>
@@ -6667,7 +6667,7 @@
             <a:r>
               <a:rPr sz="5800" b="1" i="0">
                 <a:solidFill>
-                  <a:srgbClr val="F4F1EA"/>
+                  <a:srgbClr val="F3F1EA"/>
                 </a:solidFill>
                 <a:latin typeface="Montserrat"/>
               </a:rPr>
@@ -6706,7 +6706,7 @@
             <a:r>
               <a:rPr sz="3000" b="0" i="0">
                 <a:solidFill>
-                  <a:srgbClr val="DBE6A7"/>
+                  <a:srgbClr val="B1BCB1"/>
                 </a:solidFill>
                 <a:latin typeface="Source Sans 3"/>
               </a:rPr>
@@ -6769,7 +6769,7 @@
             <a:r>
               <a:rPr sz="2000" b="0" i="0">
                 <a:solidFill>
-                  <a:srgbClr val="F4F1EA">
+                  <a:srgbClr val="F3F1EA">
                     <a:alpha val="60000"/>
                   </a:srgbClr>
                 </a:solidFill>
@@ -6794,7 +6794,7 @@
     <p:bg>
       <p:bgPr>
         <a:solidFill>
-          <a:srgbClr val="22371F"/>
+          <a:srgbClr val="1E3F1D"/>
         </a:solidFill>
         <a:effectLst/>
       </p:bgPr>
@@ -6987,7 +6987,7 @@
             <a:avLst/>
           </a:prstGeom>
           <a:solidFill>
-            <a:srgbClr val="F4F1EA"/>
+            <a:srgbClr val="F3F1EA"/>
           </a:solidFill>
           <a:ln>
             <a:noFill/>
@@ -7033,7 +7033,7 @@
             </a:avLst>
           </a:prstGeom>
           <a:solidFill>
-            <a:srgbClr val="22371F">
+            <a:srgbClr val="1E3F1D">
               <a:alpha val="90000"/>
             </a:srgbClr>
           </a:solidFill>
@@ -7094,7 +7094,7 @@
             <a:r>
               <a:rPr sz="2200" b="1" i="0" spc="200">
                 <a:solidFill>
-                  <a:srgbClr val="DBE6A7"/>
+                  <a:srgbClr val="B1BCB1"/>
                 </a:solidFill>
                 <a:latin typeface="Montserrat"/>
               </a:rPr>
@@ -7118,7 +7118,7 @@
             <a:avLst/>
           </a:prstGeom>
           <a:solidFill>
-            <a:srgbClr val="22371F">
+            <a:srgbClr val="1E3F1D">
               <a:alpha val="90000"/>
             </a:srgbClr>
           </a:solidFill>
@@ -7179,7 +7179,7 @@
             <a:r>
               <a:rPr sz="4400" b="1" i="0">
                 <a:solidFill>
-                  <a:srgbClr val="F4F1EA"/>
+                  <a:srgbClr val="F3F1EA"/>
                 </a:solidFill>
                 <a:latin typeface="Montserrat"/>
               </a:rPr>
@@ -7218,7 +7218,7 @@
             <a:r>
               <a:rPr sz="2800" b="0" i="0">
                 <a:solidFill>
-                  <a:srgbClr val="DBE6A7"/>
+                  <a:srgbClr val="B1BCB1"/>
                 </a:solidFill>
                 <a:latin typeface="Source Sans 3"/>
               </a:rPr>
@@ -7257,7 +7257,7 @@
             <a:r>
               <a:rPr sz="4400" b="1" i="0">
                 <a:solidFill>
-                  <a:srgbClr val="F4F1EA"/>
+                  <a:srgbClr val="F3F1EA"/>
                 </a:solidFill>
                 <a:latin typeface="Montserrat"/>
               </a:rPr>
@@ -7296,7 +7296,7 @@
             <a:r>
               <a:rPr sz="2800" b="0" i="0">
                 <a:solidFill>
-                  <a:srgbClr val="DBE6A7"/>
+                  <a:srgbClr val="B1BCB1"/>
                 </a:solidFill>
                 <a:latin typeface="Source Sans 3"/>
               </a:rPr>
@@ -7335,7 +7335,7 @@
             <a:r>
               <a:rPr sz="2000" b="0" i="0">
                 <a:solidFill>
-                  <a:srgbClr val="F4F1EA">
+                  <a:srgbClr val="F3F1EA">
                     <a:alpha val="60000"/>
                   </a:srgbClr>
                 </a:solidFill>
@@ -7360,7 +7360,7 @@
     <p:bg>
       <p:bgPr>
         <a:solidFill>
-          <a:srgbClr val="22371F"/>
+          <a:srgbClr val="1E3F1D"/>
         </a:solidFill>
         <a:effectLst/>
       </p:bgPr>
@@ -7472,7 +7472,7 @@
             </a:avLst>
           </a:prstGeom>
           <a:solidFill>
-            <a:srgbClr val="22371F">
+            <a:srgbClr val="1E3F1D">
               <a:alpha val="90000"/>
             </a:srgbClr>
           </a:solidFill>
@@ -7533,7 +7533,7 @@
             <a:r>
               <a:rPr sz="2200" b="1" i="0" spc="200">
                 <a:solidFill>
-                  <a:srgbClr val="DBE6A7"/>
+                  <a:srgbClr val="B1BCB1"/>
                 </a:solidFill>
                 <a:latin typeface="Montserrat"/>
               </a:rPr>
@@ -7559,12 +7559,12 @@
           <a:gradFill rotWithShape="1">
             <a:gsLst>
               <a:gs pos="0">
-                <a:srgbClr val="22371F">
+                <a:srgbClr val="1E3F1D">
                   <a:alpha val="0"/>
                 </a:srgbClr>
               </a:gs>
               <a:gs pos="100000">
-                <a:srgbClr val="22371F">
+                <a:srgbClr val="1E3F1D">
                   <a:alpha val="70000"/>
                 </a:srgbClr>
               </a:gs>
@@ -7628,7 +7628,7 @@
             <a:r>
               <a:rPr sz="12000" b="1" i="0">
                 <a:solidFill>
-                  <a:srgbClr val="DBE6A7">
+                  <a:srgbClr val="B1BCB1">
                     <a:alpha val="100000"/>
                   </a:srgbClr>
                 </a:solidFill>
@@ -7669,7 +7669,7 @@
             <a:r>
               <a:rPr sz="4000" b="1" i="0">
                 <a:solidFill>
-                  <a:srgbClr val="F4F1EA"/>
+                  <a:srgbClr val="F3F1EA"/>
                 </a:solidFill>
                 <a:latin typeface="Montserrat"/>
               </a:rPr>
@@ -7693,7 +7693,7 @@
             <a:avLst/>
           </a:prstGeom>
           <a:solidFill>
-            <a:srgbClr val="22371F">
+            <a:srgbClr val="1E3F1D">
               <a:alpha val="90000"/>
             </a:srgbClr>
           </a:solidFill>
@@ -7754,7 +7754,7 @@
             <a:r>
               <a:rPr sz="5800" b="1" i="0">
                 <a:solidFill>
-                  <a:srgbClr val="F4F1EA"/>
+                  <a:srgbClr val="F3F1EA"/>
                 </a:solidFill>
                 <a:latin typeface="Montserrat"/>
               </a:rPr>
@@ -7793,7 +7793,7 @@
             <a:r>
               <a:rPr sz="3000" b="0" i="0">
                 <a:solidFill>
-                  <a:srgbClr val="DBE6A7"/>
+                  <a:srgbClr val="B1BCB1"/>
                 </a:solidFill>
                 <a:latin typeface="Source Sans 3"/>
               </a:rPr>
@@ -7856,7 +7856,7 @@
             <a:r>
               <a:rPr sz="2000" b="0" i="0">
                 <a:solidFill>
-                  <a:srgbClr val="F4F1EA">
+                  <a:srgbClr val="F3F1EA">
                     <a:alpha val="60000"/>
                   </a:srgbClr>
                 </a:solidFill>

--- a/templates/posts/october/_templates/4-mentor.pptx
+++ b/templates/posts/october/_templates/4-mentor.pptx
@@ -3800,30 +3800,121 @@
         <p:nvPr/>
       </p:nvGrpSpPr>
       <p:grpSpPr/>
-      <p:sp>
-        <p:nvSpPr>
-          <p:cNvPr id="2" name="Rounded Rectangle 1"/>
+      <p:pic>
+        <p:nvPicPr>
+          <p:cNvPr id="2" name="Picture 1" descr="fern-sage.png"/>
+          <p:cNvPicPr>
+            <a:picLocks noChangeAspect="1"/>
+          </p:cNvPicPr>
+          <p:nvPr/>
+        </p:nvPicPr>
+        <p:blipFill>
+          <a:blip r:embed="rId3"/>
+          <a:stretch>
+            <a:fillRect/>
+          </a:stretch>
+        </p:blipFill>
+        <p:spPr>
+          <a:xfrm rot="20520000">
+            <a:off x="-1619250" y="8858250"/>
+            <a:ext cx="4953000" cy="2569892"/>
+          </a:xfrm>
+          <a:prstGeom prst="rect">
+            <a:avLst/>
+          </a:prstGeom>
+        </p:spPr>
+      </p:pic>
+      <p:pic>
+        <p:nvPicPr>
+          <p:cNvPr id="3" name="Picture 2" descr="leaf-sprig-tan.png"/>
+          <p:cNvPicPr>
+            <a:picLocks noChangeAspect="1"/>
+          </p:cNvPicPr>
+          <p:nvPr/>
+        </p:nvPicPr>
+        <p:blipFill>
+          <a:blip r:embed="rId4"/>
+          <a:stretch>
+            <a:fillRect/>
+          </a:stretch>
+        </p:blipFill>
+        <p:spPr>
+          <a:xfrm rot="840000">
+            <a:off x="8858250" y="190500"/>
+            <a:ext cx="2103247" cy="4953000"/>
+          </a:xfrm>
+          <a:prstGeom prst="rect">
+            <a:avLst/>
+          </a:prstGeom>
+        </p:spPr>
+      </p:pic>
+      <p:pic>
+        <p:nvPicPr>
+          <p:cNvPr id="4" name="Picture 3" descr="cut-blue-lines.png"/>
+          <p:cNvPicPr>
+            <a:picLocks noChangeAspect="1"/>
+          </p:cNvPicPr>
+          <p:nvPr/>
+        </p:nvPicPr>
+        <p:blipFill>
+          <a:blip r:embed="rId5"/>
+          <a:stretch>
+            <a:fillRect/>
+          </a:stretch>
+        </p:blipFill>
+        <p:spPr>
+          <a:xfrm rot="480000">
+            <a:off x="8620125" y="9620250"/>
+            <a:ext cx="2190750" cy="2658858"/>
+          </a:xfrm>
+          <a:prstGeom prst="rect">
+            <a:avLst/>
+          </a:prstGeom>
+        </p:spPr>
+      </p:pic>
+      <p:pic>
+        <p:nvPicPr>
+          <p:cNvPr id="5" name="Picture 4" descr="cut-green-scribble.png"/>
+          <p:cNvPicPr>
+            <a:picLocks noChangeAspect="1"/>
+          </p:cNvPicPr>
+          <p:nvPr/>
+        </p:nvPicPr>
+        <p:blipFill>
+          <a:blip r:embed="rId6"/>
+          <a:stretch>
+            <a:fillRect/>
+          </a:stretch>
+        </p:blipFill>
+        <p:spPr>
+          <a:xfrm rot="21000000">
+            <a:off x="-666750" y="381000"/>
+            <a:ext cx="1714500" cy="2363931"/>
+          </a:xfrm>
+          <a:prstGeom prst="rect">
+            <a:avLst/>
+          </a:prstGeom>
+        </p:spPr>
+      </p:pic>
+      <p:sp>
+        <p:nvSpPr>
+          <p:cNvPr id="6" name="Rounded Rectangle 5"/>
           <p:cNvSpPr/>
           <p:nvPr/>
         </p:nvSpPr>
         <p:spPr>
-          <a:xfrm rot="180000">
-            <a:off x="952500" y="809625"/>
-            <a:ext cx="8382000" cy="11239500"/>
+          <a:xfrm>
+            <a:off x="666750" y="381000"/>
+            <a:ext cx="8953500" cy="12096750"/>
           </a:xfrm>
           <a:prstGeom prst="roundRect">
             <a:avLst>
-              <a:gd name="adj" fmla="val 3181"/>
+              <a:gd name="adj" fmla="val 2978"/>
             </a:avLst>
           </a:prstGeom>
-          <a:pattFill prst="ltUpDiag">
-            <a:fgClr>
-              <a:srgbClr val="E8E2D4"/>
-            </a:fgClr>
-            <a:bgClr>
-              <a:srgbClr val="F3F1EA"/>
-            </a:bgClr>
-          </a:pattFill>
+          <a:solidFill>
+            <a:srgbClr val="F3F1EA"/>
+          </a:solidFill>
           <a:ln>
             <a:noFill/>
           </a:ln>
@@ -3859,25 +3950,23 @@
       </p:sp>
       <p:sp>
         <p:nvSpPr>
-          <p:cNvPr id="3" name="Rectangle 2"/>
+          <p:cNvPr id="7" name="Round Same Side Corner Rectangle 6"/>
           <p:cNvSpPr/>
           <p:nvPr/>
         </p:nvSpPr>
         <p:spPr>
-          <a:xfrm rot="180000">
-            <a:off x="1600720" y="1195598"/>
-            <a:ext cx="3810000" cy="3810000"/>
-          </a:xfrm>
-          <a:prstGeom prst="rect">
+          <a:xfrm>
+            <a:off x="666750" y="381000"/>
+            <a:ext cx="8953500" cy="5715000"/>
+          </a:xfrm>
+          <a:prstGeom prst="round2SameRect">
             <a:avLst/>
           </a:prstGeom>
           <a:solidFill>
-            <a:srgbClr val="F3F1EA"/>
+            <a:srgbClr val="C9C4B8"/>
           </a:solidFill>
-          <a:ln w="19050">
-            <a:solidFill>
-              <a:srgbClr val="1E3F1D"/>
-            </a:solidFill>
+          <a:ln>
+            <a:noFill/>
           </a:ln>
           <a:effectLst/>
         </p:spPr>
@@ -3905,58 +3994,14 @@
       </p:sp>
       <p:sp>
         <p:nvSpPr>
-          <p:cNvPr id="4" name="Rectangle 3"/>
-          <p:cNvSpPr/>
-          <p:nvPr/>
-        </p:nvSpPr>
-        <p:spPr>
-          <a:xfrm rot="180000">
-            <a:off x="1695970" y="1290848"/>
-            <a:ext cx="3619500" cy="3619500"/>
-          </a:xfrm>
-          <a:prstGeom prst="rect">
-            <a:avLst/>
-          </a:prstGeom>
-          <a:solidFill>
-            <a:srgbClr val="C9C4B8"/>
-          </a:solidFill>
-          <a:ln>
-            <a:noFill/>
-          </a:ln>
-          <a:effectLst/>
-        </p:spPr>
-        <p:style>
-          <a:lnRef idx="1">
-            <a:schemeClr val="accent1"/>
-          </a:lnRef>
-          <a:fillRef idx="3">
-            <a:schemeClr val="accent1"/>
-          </a:fillRef>
-          <a:effectRef idx="2">
-            <a:schemeClr val="accent1"/>
-          </a:effectRef>
-          <a:fontRef idx="minor">
-            <a:schemeClr val="lt1"/>
-          </a:fontRef>
-        </p:style>
-        <p:txBody>
-          <a:bodyPr rtlCol="0" anchor="ctr"/>
-          <a:lstStyle/>
-          <a:p>
-            <a:pPr algn="ctr"/>
-          </a:p>
-        </p:txBody>
-      </p:sp>
-      <p:sp>
-        <p:nvSpPr>
-          <p:cNvPr id="5" name="TextBox 4"/>
+          <p:cNvPr id="8" name="TextBox 7"/>
           <p:cNvSpPr txBox="1"/>
           <p:nvPr/>
         </p:nvSpPr>
         <p:spPr>
-          <a:xfrm rot="180000">
-            <a:off x="1848370" y="1290848"/>
-            <a:ext cx="3314700" cy="3619500"/>
+          <a:xfrm>
+            <a:off x="819150" y="381000"/>
+            <a:ext cx="8648700" cy="5715000"/>
           </a:xfrm>
           <a:prstGeom prst="rect">
             <a:avLst/>
@@ -3988,2136 +4033,457 @@
       </p:sp>
       <p:sp>
         <p:nvSpPr>
-          <p:cNvPr id="6" name="Oval 5"/>
-          <p:cNvSpPr/>
+          <p:cNvPr id="9" name="TextBox 8"/>
+          <p:cNvSpPr txBox="1"/>
           <p:nvPr/>
         </p:nvSpPr>
         <p:spPr>
-          <a:xfrm rot="180000">
-            <a:off x="8634636" y="2198966"/>
-            <a:ext cx="457200" cy="457200"/>
-          </a:xfrm>
-          <a:prstGeom prst="ellipse">
+          <a:xfrm>
+            <a:off x="1047750" y="6286500"/>
+            <a:ext cx="8191500" cy="762000"/>
+          </a:xfrm>
+          <a:prstGeom prst="rect">
             <a:avLst/>
           </a:prstGeom>
-          <a:solidFill>
-            <a:srgbClr val="31662F"/>
-          </a:solidFill>
-          <a:ln>
-            <a:noFill/>
-          </a:ln>
-          <a:effectLst/>
-        </p:spPr>
-        <p:style>
-          <a:lnRef idx="1">
-            <a:schemeClr val="accent1"/>
-          </a:lnRef>
-          <a:fillRef idx="3">
-            <a:schemeClr val="accent1"/>
-          </a:fillRef>
-          <a:effectRef idx="2">
-            <a:schemeClr val="accent1"/>
-          </a:effectRef>
-          <a:fontRef idx="minor">
-            <a:schemeClr val="lt1"/>
-          </a:fontRef>
-        </p:style>
-        <p:txBody>
-          <a:bodyPr rtlCol="0" anchor="ctr"/>
-          <a:lstStyle/>
-          <a:p>
-            <a:pPr algn="ctr"/>
-          </a:p>
-        </p:txBody>
-      </p:sp>
-      <p:sp>
-        <p:nvSpPr>
-          <p:cNvPr id="7" name="Oval 6"/>
-          <p:cNvSpPr/>
+          <a:noFill/>
+        </p:spPr>
+        <p:txBody>
+          <a:bodyPr wrap="square" lIns="0" rIns="0" tIns="0" bIns="0" anchor="t">
+            <a:spAutoFit/>
+          </a:bodyPr>
+          <a:lstStyle/>
+          <a:p>
+            <a:pPr algn="l">
+              <a:lnSpc>
+                <a:spcPct val="100000"/>
+              </a:lnSpc>
+            </a:pPr>
+            <a:r>
+              <a:rPr sz="5600" b="1" i="0">
+                <a:solidFill>
+                  <a:srgbClr val="1E3F1D"/>
+                </a:solidFill>
+                <a:latin typeface="Montserrat"/>
+              </a:rPr>
+              <a:t>Mentor Name</a:t>
+            </a:r>
+          </a:p>
+        </p:txBody>
+      </p:sp>
+      <p:sp>
+        <p:nvSpPr>
+          <p:cNvPr id="10" name="TextBox 9"/>
+          <p:cNvSpPr txBox="1"/>
           <p:nvPr/>
         </p:nvSpPr>
         <p:spPr>
-          <a:xfrm rot="180000">
-            <a:off x="8563280" y="2479931"/>
-            <a:ext cx="457200" cy="457200"/>
-          </a:xfrm>
-          <a:prstGeom prst="ellipse">
+          <a:xfrm>
+            <a:off x="1047750" y="7077075"/>
+            <a:ext cx="8191500" cy="381000"/>
+          </a:xfrm>
+          <a:prstGeom prst="rect">
             <a:avLst/>
           </a:prstGeom>
-          <a:solidFill>
-            <a:srgbClr val="31662F"/>
-          </a:solidFill>
-          <a:ln>
-            <a:noFill/>
-          </a:ln>
-          <a:effectLst/>
-        </p:spPr>
-        <p:style>
-          <a:lnRef idx="1">
-            <a:schemeClr val="accent1"/>
-          </a:lnRef>
-          <a:fillRef idx="3">
-            <a:schemeClr val="accent1"/>
-          </a:fillRef>
-          <a:effectRef idx="2">
-            <a:schemeClr val="accent1"/>
-          </a:effectRef>
-          <a:fontRef idx="minor">
-            <a:schemeClr val="lt1"/>
-          </a:fontRef>
-        </p:style>
-        <p:txBody>
-          <a:bodyPr rtlCol="0" anchor="ctr"/>
-          <a:lstStyle/>
-          <a:p>
-            <a:pPr algn="ctr"/>
-          </a:p>
-        </p:txBody>
-      </p:sp>
-      <p:sp>
-        <p:nvSpPr>
-          <p:cNvPr id="8" name="Oval 7"/>
-          <p:cNvSpPr/>
+          <a:noFill/>
+        </p:spPr>
+        <p:txBody>
+          <a:bodyPr wrap="square" lIns="0" rIns="0" tIns="0" bIns="0" anchor="t">
+            <a:spAutoFit/>
+          </a:bodyPr>
+          <a:lstStyle/>
+          <a:p>
+            <a:pPr algn="l">
+              <a:lnSpc>
+                <a:spcPct val="110000"/>
+              </a:lnSpc>
+            </a:pPr>
+            <a:r>
+              <a:rPr sz="2600" b="0" i="0">
+                <a:solidFill>
+                  <a:srgbClr val="31662F"/>
+                </a:solidFill>
+                <a:latin typeface="Source Sans 3"/>
+              </a:rPr>
+              <a:t>Role</a:t>
+            </a:r>
+          </a:p>
+        </p:txBody>
+      </p:sp>
+      <p:sp>
+        <p:nvSpPr>
+          <p:cNvPr id="11" name="TextBox 10"/>
+          <p:cNvSpPr txBox="1"/>
           <p:nvPr/>
         </p:nvSpPr>
         <p:spPr>
-          <a:xfrm rot="180000">
-            <a:off x="8389835" y="2712203"/>
-            <a:ext cx="457200" cy="457200"/>
-          </a:xfrm>
-          <a:prstGeom prst="ellipse">
+          <a:xfrm>
+            <a:off x="1047750" y="7620000"/>
+            <a:ext cx="8191500" cy="1050265"/>
+          </a:xfrm>
+          <a:prstGeom prst="rect">
             <a:avLst/>
           </a:prstGeom>
-          <a:solidFill>
-            <a:srgbClr val="31662F"/>
-          </a:solidFill>
-          <a:ln>
-            <a:noFill/>
-          </a:ln>
-          <a:effectLst/>
-        </p:spPr>
-        <p:style>
-          <a:lnRef idx="1">
-            <a:schemeClr val="accent1"/>
-          </a:lnRef>
-          <a:fillRef idx="3">
-            <a:schemeClr val="accent1"/>
-          </a:fillRef>
-          <a:effectRef idx="2">
-            <a:schemeClr val="accent1"/>
-          </a:effectRef>
-          <a:fontRef idx="minor">
-            <a:schemeClr val="lt1"/>
-          </a:fontRef>
-        </p:style>
-        <p:txBody>
-          <a:bodyPr rtlCol="0" anchor="ctr"/>
-          <a:lstStyle/>
-          <a:p>
-            <a:pPr algn="ctr"/>
-          </a:p>
-        </p:txBody>
-      </p:sp>
-      <p:sp>
-        <p:nvSpPr>
-          <p:cNvPr id="9" name="Oval 8"/>
-          <p:cNvSpPr/>
+          <a:noFill/>
+        </p:spPr>
+        <p:txBody>
+          <a:bodyPr wrap="square" lIns="0" rIns="0" tIns="0" bIns="0" anchor="t">
+            <a:spAutoFit/>
+          </a:bodyPr>
+          <a:lstStyle/>
+          <a:p>
+            <a:pPr algn="l">
+              <a:lnSpc>
+                <a:spcPct val="115000"/>
+              </a:lnSpc>
+            </a:pPr>
+            <a:r>
+              <a:rPr sz="3400" b="1" i="0">
+                <a:solidFill>
+                  <a:srgbClr val="1E3F1D"/>
+                </a:solidFill>
+                <a:latin typeface="Montserrat"/>
+              </a:rPr>
+              <a:t>“Their advice, in their words.”</a:t>
+            </a:r>
+          </a:p>
+        </p:txBody>
+      </p:sp>
+      <p:sp>
+        <p:nvSpPr>
+          <p:cNvPr id="12" name="TextBox 11"/>
+          <p:cNvSpPr txBox="1"/>
           <p:nvPr/>
         </p:nvSpPr>
         <p:spPr>
-          <a:xfrm rot="180000">
-            <a:off x="8140706" y="2860419"/>
-            <a:ext cx="457200" cy="457200"/>
-          </a:xfrm>
-          <a:prstGeom prst="ellipse">
+          <a:xfrm>
+            <a:off x="1047750" y="8860765"/>
+            <a:ext cx="3238500" cy="228600"/>
+          </a:xfrm>
+          <a:prstGeom prst="rect">
             <a:avLst/>
           </a:prstGeom>
-          <a:solidFill>
-            <a:srgbClr val="31662F"/>
-          </a:solidFill>
-          <a:ln>
-            <a:noFill/>
-          </a:ln>
-          <a:effectLst/>
-        </p:spPr>
-        <p:style>
-          <a:lnRef idx="1">
-            <a:schemeClr val="accent1"/>
-          </a:lnRef>
-          <a:fillRef idx="3">
-            <a:schemeClr val="accent1"/>
-          </a:fillRef>
-          <a:effectRef idx="2">
-            <a:schemeClr val="accent1"/>
-          </a:effectRef>
-          <a:fontRef idx="minor">
-            <a:schemeClr val="lt1"/>
-          </a:fontRef>
-        </p:style>
-        <p:txBody>
-          <a:bodyPr rtlCol="0" anchor="ctr"/>
-          <a:lstStyle/>
-          <a:p>
-            <a:pPr algn="ctr"/>
-          </a:p>
-        </p:txBody>
-      </p:sp>
-      <p:sp>
-        <p:nvSpPr>
-          <p:cNvPr id="10" name="Oval 9"/>
-          <p:cNvSpPr/>
+          <a:noFill/>
+        </p:spPr>
+        <p:txBody>
+          <a:bodyPr wrap="square" lIns="0" rIns="0" tIns="0" bIns="0" anchor="t">
+            <a:spAutoFit/>
+          </a:bodyPr>
+          <a:lstStyle/>
+          <a:p>
+            <a:pPr algn="l">
+              <a:lnSpc>
+                <a:spcPct val="120000"/>
+              </a:lnSpc>
+            </a:pPr>
+            <a:r>
+              <a:rPr sz="1600" b="1" i="0" spc="150">
+                <a:solidFill>
+                  <a:srgbClr val="31662F"/>
+                </a:solidFill>
+                <a:latin typeface="Montserrat"/>
+              </a:rPr>
+              <a:t>BASED IN</a:t>
+            </a:r>
+          </a:p>
+        </p:txBody>
+      </p:sp>
+      <p:sp>
+        <p:nvSpPr>
+          <p:cNvPr id="13" name="TextBox 12"/>
+          <p:cNvSpPr txBox="1"/>
           <p:nvPr/>
         </p:nvSpPr>
         <p:spPr>
-          <a:xfrm rot="180000">
-            <a:off x="7853821" y="2902015"/>
-            <a:ext cx="457200" cy="457200"/>
-          </a:xfrm>
-          <a:prstGeom prst="ellipse">
+          <a:xfrm>
+            <a:off x="1047750" y="9136990"/>
+            <a:ext cx="3238500" cy="597526"/>
+          </a:xfrm>
+          <a:prstGeom prst="rect">
             <a:avLst/>
           </a:prstGeom>
-          <a:solidFill>
-            <a:srgbClr val="31662F"/>
-          </a:solidFill>
-          <a:ln>
-            <a:noFill/>
-          </a:ln>
-          <a:effectLst/>
-        </p:spPr>
-        <p:style>
-          <a:lnRef idx="1">
-            <a:schemeClr val="accent1"/>
-          </a:lnRef>
-          <a:fillRef idx="3">
-            <a:schemeClr val="accent1"/>
-          </a:fillRef>
-          <a:effectRef idx="2">
-            <a:schemeClr val="accent1"/>
-          </a:effectRef>
-          <a:fontRef idx="minor">
-            <a:schemeClr val="lt1"/>
-          </a:fontRef>
-        </p:style>
-        <p:txBody>
-          <a:bodyPr rtlCol="0" anchor="ctr"/>
-          <a:lstStyle/>
-          <a:p>
-            <a:pPr algn="ctr"/>
-          </a:p>
-        </p:txBody>
-      </p:sp>
-      <p:sp>
-        <p:nvSpPr>
-          <p:cNvPr id="11" name="Oval 10"/>
-          <p:cNvSpPr/>
+          <a:noFill/>
+        </p:spPr>
+        <p:txBody>
+          <a:bodyPr wrap="square" lIns="0" rIns="0" tIns="0" bIns="0" anchor="t">
+            <a:spAutoFit/>
+          </a:bodyPr>
+          <a:lstStyle/>
+          <a:p>
+            <a:pPr algn="l">
+              <a:lnSpc>
+                <a:spcPct val="115000"/>
+              </a:lnSpc>
+            </a:pPr>
+            <a:r>
+              <a:rPr sz="2200" b="0" i="0">
+                <a:solidFill>
+                  <a:srgbClr val="333130"/>
+                </a:solidFill>
+                <a:latin typeface="Source Sans 3"/>
+              </a:rPr>
+              <a:t>Place</a:t>
+            </a:r>
+          </a:p>
+        </p:txBody>
+      </p:sp>
+      <p:sp>
+        <p:nvSpPr>
+          <p:cNvPr id="14" name="TextBox 13"/>
+          <p:cNvSpPr txBox="1"/>
           <p:nvPr/>
         </p:nvSpPr>
         <p:spPr>
-          <a:xfrm rot="180000">
-            <a:off x="7572856" y="2830659"/>
-            <a:ext cx="457200" cy="457200"/>
-          </a:xfrm>
-          <a:prstGeom prst="ellipse">
+          <a:xfrm>
+            <a:off x="4572000" y="8860765"/>
+            <a:ext cx="3238500" cy="228600"/>
+          </a:xfrm>
+          <a:prstGeom prst="rect">
             <a:avLst/>
           </a:prstGeom>
-          <a:solidFill>
-            <a:srgbClr val="31662F"/>
-          </a:solidFill>
-          <a:ln>
-            <a:noFill/>
-          </a:ln>
-          <a:effectLst/>
-        </p:spPr>
-        <p:style>
-          <a:lnRef idx="1">
-            <a:schemeClr val="accent1"/>
-          </a:lnRef>
-          <a:fillRef idx="3">
-            <a:schemeClr val="accent1"/>
-          </a:fillRef>
-          <a:effectRef idx="2">
-            <a:schemeClr val="accent1"/>
-          </a:effectRef>
-          <a:fontRef idx="minor">
-            <a:schemeClr val="lt1"/>
-          </a:fontRef>
-        </p:style>
-        <p:txBody>
-          <a:bodyPr rtlCol="0" anchor="ctr"/>
-          <a:lstStyle/>
-          <a:p>
-            <a:pPr algn="ctr"/>
-          </a:p>
-        </p:txBody>
-      </p:sp>
-      <p:sp>
-        <p:nvSpPr>
-          <p:cNvPr id="12" name="Oval 11"/>
-          <p:cNvSpPr/>
+          <a:noFill/>
+        </p:spPr>
+        <p:txBody>
+          <a:bodyPr wrap="square" lIns="0" rIns="0" tIns="0" bIns="0" anchor="t">
+            <a:spAutoFit/>
+          </a:bodyPr>
+          <a:lstStyle/>
+          <a:p>
+            <a:pPr algn="l">
+              <a:lnSpc>
+                <a:spcPct val="120000"/>
+              </a:lnSpc>
+            </a:pPr>
+            <a:r>
+              <a:rPr sz="1600" b="1" i="0" spc="150">
+                <a:solidFill>
+                  <a:srgbClr val="31662F"/>
+                </a:solidFill>
+                <a:latin typeface="Montserrat"/>
+              </a:rPr>
+              <a:t>TEACHING SINCE</a:t>
+            </a:r>
+          </a:p>
+        </p:txBody>
+      </p:sp>
+      <p:sp>
+        <p:nvSpPr>
+          <p:cNvPr id="15" name="TextBox 14"/>
+          <p:cNvSpPr txBox="1"/>
           <p:nvPr/>
         </p:nvSpPr>
         <p:spPr>
-          <a:xfrm rot="180000">
-            <a:off x="7340584" y="2657214"/>
-            <a:ext cx="457200" cy="457200"/>
-          </a:xfrm>
-          <a:prstGeom prst="ellipse">
+          <a:xfrm>
+            <a:off x="4572000" y="9136990"/>
+            <a:ext cx="3238500" cy="597526"/>
+          </a:xfrm>
+          <a:prstGeom prst="rect">
             <a:avLst/>
           </a:prstGeom>
-          <a:solidFill>
-            <a:srgbClr val="31662F"/>
-          </a:solidFill>
-          <a:ln>
-            <a:noFill/>
-          </a:ln>
-          <a:effectLst/>
-        </p:spPr>
-        <p:style>
-          <a:lnRef idx="1">
-            <a:schemeClr val="accent1"/>
-          </a:lnRef>
-          <a:fillRef idx="3">
-            <a:schemeClr val="accent1"/>
-          </a:fillRef>
-          <a:effectRef idx="2">
-            <a:schemeClr val="accent1"/>
-          </a:effectRef>
-          <a:fontRef idx="minor">
-            <a:schemeClr val="lt1"/>
-          </a:fontRef>
-        </p:style>
-        <p:txBody>
-          <a:bodyPr rtlCol="0" anchor="ctr"/>
-          <a:lstStyle/>
-          <a:p>
-            <a:pPr algn="ctr"/>
-          </a:p>
-        </p:txBody>
-      </p:sp>
-      <p:sp>
-        <p:nvSpPr>
-          <p:cNvPr id="13" name="Oval 12"/>
-          <p:cNvSpPr/>
+          <a:noFill/>
+        </p:spPr>
+        <p:txBody>
+          <a:bodyPr wrap="square" lIns="0" rIns="0" tIns="0" bIns="0" anchor="t">
+            <a:spAutoFit/>
+          </a:bodyPr>
+          <a:lstStyle/>
+          <a:p>
+            <a:pPr algn="l">
+              <a:lnSpc>
+                <a:spcPct val="115000"/>
+              </a:lnSpc>
+            </a:pPr>
+            <a:r>
+              <a:rPr sz="2200" b="0" i="0">
+                <a:solidFill>
+                  <a:srgbClr val="333130"/>
+                </a:solidFill>
+                <a:latin typeface="Source Sans 3"/>
+              </a:rPr>
+              <a:t>Year</a:t>
+            </a:r>
+          </a:p>
+        </p:txBody>
+      </p:sp>
+      <p:sp>
+        <p:nvSpPr>
+          <p:cNvPr id="16" name="TextBox 15"/>
+          <p:cNvSpPr txBox="1"/>
           <p:nvPr/>
         </p:nvSpPr>
         <p:spPr>
-          <a:xfrm rot="180000">
-            <a:off x="7192368" y="2408085"/>
-            <a:ext cx="457200" cy="457200"/>
-          </a:xfrm>
-          <a:prstGeom prst="ellipse">
+          <a:xfrm>
+            <a:off x="1047750" y="9629742"/>
+            <a:ext cx="3238500" cy="228600"/>
+          </a:xfrm>
+          <a:prstGeom prst="rect">
             <a:avLst/>
           </a:prstGeom>
-          <a:solidFill>
-            <a:srgbClr val="31662F"/>
-          </a:solidFill>
-          <a:ln>
-            <a:noFill/>
-          </a:ln>
-          <a:effectLst/>
-        </p:spPr>
-        <p:style>
-          <a:lnRef idx="1">
-            <a:schemeClr val="accent1"/>
-          </a:lnRef>
-          <a:fillRef idx="3">
-            <a:schemeClr val="accent1"/>
-          </a:fillRef>
-          <a:effectRef idx="2">
-            <a:schemeClr val="accent1"/>
-          </a:effectRef>
-          <a:fontRef idx="minor">
-            <a:schemeClr val="lt1"/>
-          </a:fontRef>
-        </p:style>
-        <p:txBody>
-          <a:bodyPr rtlCol="0" anchor="ctr"/>
-          <a:lstStyle/>
-          <a:p>
-            <a:pPr algn="ctr"/>
-          </a:p>
-        </p:txBody>
-      </p:sp>
-      <p:sp>
-        <p:nvSpPr>
-          <p:cNvPr id="14" name="Oval 13"/>
-          <p:cNvSpPr/>
+          <a:noFill/>
+        </p:spPr>
+        <p:txBody>
+          <a:bodyPr wrap="square" lIns="0" rIns="0" tIns="0" bIns="0" anchor="t">
+            <a:spAutoFit/>
+          </a:bodyPr>
+          <a:lstStyle/>
+          <a:p>
+            <a:pPr algn="l">
+              <a:lnSpc>
+                <a:spcPct val="120000"/>
+              </a:lnSpc>
+            </a:pPr>
+            <a:r>
+              <a:rPr sz="1600" b="1" i="0" spc="150">
+                <a:solidFill>
+                  <a:srgbClr val="31662F"/>
+                </a:solidFill>
+                <a:latin typeface="Montserrat"/>
+              </a:rPr>
+              <a:t>BACKGROUND</a:t>
+            </a:r>
+          </a:p>
+        </p:txBody>
+      </p:sp>
+      <p:sp>
+        <p:nvSpPr>
+          <p:cNvPr id="17" name="TextBox 16"/>
+          <p:cNvSpPr txBox="1"/>
           <p:nvPr/>
         </p:nvSpPr>
         <p:spPr>
-          <a:xfrm rot="180000">
-            <a:off x="7150772" y="2121200"/>
-            <a:ext cx="457200" cy="457200"/>
-          </a:xfrm>
-          <a:prstGeom prst="ellipse">
+          <a:xfrm>
+            <a:off x="1047750" y="9905967"/>
+            <a:ext cx="3238500" cy="918828"/>
+          </a:xfrm>
+          <a:prstGeom prst="rect">
             <a:avLst/>
           </a:prstGeom>
-          <a:solidFill>
-            <a:srgbClr val="31662F"/>
-          </a:solidFill>
-          <a:ln>
-            <a:noFill/>
-          </a:ln>
-          <a:effectLst/>
-        </p:spPr>
-        <p:style>
-          <a:lnRef idx="1">
-            <a:schemeClr val="accent1"/>
-          </a:lnRef>
-          <a:fillRef idx="3">
-            <a:schemeClr val="accent1"/>
-          </a:fillRef>
-          <a:effectRef idx="2">
-            <a:schemeClr val="accent1"/>
-          </a:effectRef>
-          <a:fontRef idx="minor">
-            <a:schemeClr val="lt1"/>
-          </a:fontRef>
-        </p:style>
-        <p:txBody>
-          <a:bodyPr rtlCol="0" anchor="ctr"/>
-          <a:lstStyle/>
-          <a:p>
-            <a:pPr algn="ctr"/>
-          </a:p>
-        </p:txBody>
-      </p:sp>
-      <p:sp>
-        <p:nvSpPr>
-          <p:cNvPr id="15" name="Oval 14"/>
-          <p:cNvSpPr/>
+          <a:noFill/>
+        </p:spPr>
+        <p:txBody>
+          <a:bodyPr wrap="square" lIns="0" rIns="0" tIns="0" bIns="0" anchor="t">
+            <a:spAutoFit/>
+          </a:bodyPr>
+          <a:lstStyle/>
+          <a:p>
+            <a:pPr algn="l">
+              <a:lnSpc>
+                <a:spcPct val="115000"/>
+              </a:lnSpc>
+            </a:pPr>
+            <a:r>
+              <a:rPr sz="2200" b="0" i="0">
+                <a:solidFill>
+                  <a:srgbClr val="333130"/>
+                </a:solidFill>
+                <a:latin typeface="Source Sans 3"/>
+              </a:rPr>
+              <a:t>Background in one or two lines</a:t>
+            </a:r>
+          </a:p>
+        </p:txBody>
+      </p:sp>
+      <p:sp>
+        <p:nvSpPr>
+          <p:cNvPr id="18" name="TextBox 17"/>
+          <p:cNvSpPr txBox="1"/>
           <p:nvPr/>
         </p:nvSpPr>
         <p:spPr>
-          <a:xfrm rot="180000">
-            <a:off x="7222128" y="1840235"/>
-            <a:ext cx="457200" cy="457200"/>
-          </a:xfrm>
-          <a:prstGeom prst="ellipse">
+          <a:xfrm>
+            <a:off x="4572000" y="9629742"/>
+            <a:ext cx="3238500" cy="228600"/>
+          </a:xfrm>
+          <a:prstGeom prst="rect">
             <a:avLst/>
           </a:prstGeom>
-          <a:solidFill>
-            <a:srgbClr val="31662F"/>
-          </a:solidFill>
-          <a:ln>
-            <a:noFill/>
-          </a:ln>
-          <a:effectLst/>
-        </p:spPr>
-        <p:style>
-          <a:lnRef idx="1">
-            <a:schemeClr val="accent1"/>
-          </a:lnRef>
-          <a:fillRef idx="3">
-            <a:schemeClr val="accent1"/>
-          </a:fillRef>
-          <a:effectRef idx="2">
-            <a:schemeClr val="accent1"/>
-          </a:effectRef>
-          <a:fontRef idx="minor">
-            <a:schemeClr val="lt1"/>
-          </a:fontRef>
-        </p:style>
-        <p:txBody>
-          <a:bodyPr rtlCol="0" anchor="ctr"/>
-          <a:lstStyle/>
-          <a:p>
-            <a:pPr algn="ctr"/>
-          </a:p>
-        </p:txBody>
-      </p:sp>
-      <p:sp>
-        <p:nvSpPr>
-          <p:cNvPr id="16" name="Oval 15"/>
-          <p:cNvSpPr/>
+          <a:noFill/>
+        </p:spPr>
+        <p:txBody>
+          <a:bodyPr wrap="square" lIns="0" rIns="0" tIns="0" bIns="0" anchor="t">
+            <a:spAutoFit/>
+          </a:bodyPr>
+          <a:lstStyle/>
+          <a:p>
+            <a:pPr algn="l">
+              <a:lnSpc>
+                <a:spcPct val="120000"/>
+              </a:lnSpc>
+            </a:pPr>
+            <a:r>
+              <a:rPr sz="1600" b="1" i="0" spc="150">
+                <a:solidFill>
+                  <a:srgbClr val="31662F"/>
+                </a:solidFill>
+                <a:latin typeface="Montserrat"/>
+              </a:rPr>
+              <a:t>KNOWN FOR</a:t>
+            </a:r>
+          </a:p>
+        </p:txBody>
+      </p:sp>
+      <p:sp>
+        <p:nvSpPr>
+          <p:cNvPr id="19" name="TextBox 18"/>
+          <p:cNvSpPr txBox="1"/>
           <p:nvPr/>
         </p:nvSpPr>
         <p:spPr>
-          <a:xfrm rot="180000">
-            <a:off x="7395573" y="1607964"/>
-            <a:ext cx="457200" cy="457200"/>
-          </a:xfrm>
-          <a:prstGeom prst="ellipse">
+          <a:xfrm>
+            <a:off x="4572000" y="9905967"/>
+            <a:ext cx="3238500" cy="597526"/>
+          </a:xfrm>
+          <a:prstGeom prst="rect">
             <a:avLst/>
           </a:prstGeom>
-          <a:solidFill>
-            <a:srgbClr val="31662F"/>
-          </a:solidFill>
-          <a:ln>
-            <a:noFill/>
-          </a:ln>
-          <a:effectLst/>
-        </p:spPr>
-        <p:style>
-          <a:lnRef idx="1">
-            <a:schemeClr val="accent1"/>
-          </a:lnRef>
-          <a:fillRef idx="3">
-            <a:schemeClr val="accent1"/>
-          </a:fillRef>
-          <a:effectRef idx="2">
-            <a:schemeClr val="accent1"/>
-          </a:effectRef>
-          <a:fontRef idx="minor">
-            <a:schemeClr val="lt1"/>
-          </a:fontRef>
-        </p:style>
-        <p:txBody>
-          <a:bodyPr rtlCol="0" anchor="ctr"/>
-          <a:lstStyle/>
-          <a:p>
-            <a:pPr algn="ctr"/>
-          </a:p>
-        </p:txBody>
-      </p:sp>
-      <p:sp>
-        <p:nvSpPr>
-          <p:cNvPr id="17" name="Oval 16"/>
-          <p:cNvSpPr/>
-          <p:nvPr/>
-        </p:nvSpPr>
-        <p:spPr>
-          <a:xfrm rot="180000">
-            <a:off x="7644702" y="1459748"/>
-            <a:ext cx="457200" cy="457200"/>
-          </a:xfrm>
-          <a:prstGeom prst="ellipse">
-            <a:avLst/>
-          </a:prstGeom>
-          <a:solidFill>
-            <a:srgbClr val="31662F"/>
-          </a:solidFill>
-          <a:ln>
-            <a:noFill/>
-          </a:ln>
-          <a:effectLst/>
-        </p:spPr>
-        <p:style>
-          <a:lnRef idx="1">
-            <a:schemeClr val="accent1"/>
-          </a:lnRef>
-          <a:fillRef idx="3">
-            <a:schemeClr val="accent1"/>
-          </a:fillRef>
-          <a:effectRef idx="2">
-            <a:schemeClr val="accent1"/>
-          </a:effectRef>
-          <a:fontRef idx="minor">
-            <a:schemeClr val="lt1"/>
-          </a:fontRef>
-        </p:style>
-        <p:txBody>
-          <a:bodyPr rtlCol="0" anchor="ctr"/>
-          <a:lstStyle/>
-          <a:p>
-            <a:pPr algn="ctr"/>
-          </a:p>
-        </p:txBody>
-      </p:sp>
-      <p:sp>
-        <p:nvSpPr>
-          <p:cNvPr id="18" name="Oval 17"/>
-          <p:cNvSpPr/>
-          <p:nvPr/>
-        </p:nvSpPr>
-        <p:spPr>
-          <a:xfrm rot="180000">
-            <a:off x="7931587" y="1418151"/>
-            <a:ext cx="457200" cy="457200"/>
-          </a:xfrm>
-          <a:prstGeom prst="ellipse">
-            <a:avLst/>
-          </a:prstGeom>
-          <a:solidFill>
-            <a:srgbClr val="31662F"/>
-          </a:solidFill>
-          <a:ln>
-            <a:noFill/>
-          </a:ln>
-          <a:effectLst/>
-        </p:spPr>
-        <p:style>
-          <a:lnRef idx="1">
-            <a:schemeClr val="accent1"/>
-          </a:lnRef>
-          <a:fillRef idx="3">
-            <a:schemeClr val="accent1"/>
-          </a:fillRef>
-          <a:effectRef idx="2">
-            <a:schemeClr val="accent1"/>
-          </a:effectRef>
-          <a:fontRef idx="minor">
-            <a:schemeClr val="lt1"/>
-          </a:fontRef>
-        </p:style>
-        <p:txBody>
-          <a:bodyPr rtlCol="0" anchor="ctr"/>
-          <a:lstStyle/>
-          <a:p>
-            <a:pPr algn="ctr"/>
-          </a:p>
-        </p:txBody>
-      </p:sp>
-      <p:sp>
-        <p:nvSpPr>
-          <p:cNvPr id="19" name="Oval 18"/>
-          <p:cNvSpPr/>
-          <p:nvPr/>
-        </p:nvSpPr>
-        <p:spPr>
-          <a:xfrm rot="180000">
-            <a:off x="8212552" y="1489507"/>
-            <a:ext cx="457200" cy="457200"/>
-          </a:xfrm>
-          <a:prstGeom prst="ellipse">
-            <a:avLst/>
-          </a:prstGeom>
-          <a:solidFill>
-            <a:srgbClr val="31662F"/>
-          </a:solidFill>
-          <a:ln>
-            <a:noFill/>
-          </a:ln>
-          <a:effectLst/>
-        </p:spPr>
-        <p:style>
-          <a:lnRef idx="1">
-            <a:schemeClr val="accent1"/>
-          </a:lnRef>
-          <a:fillRef idx="3">
-            <a:schemeClr val="accent1"/>
-          </a:fillRef>
-          <a:effectRef idx="2">
-            <a:schemeClr val="accent1"/>
-          </a:effectRef>
-          <a:fontRef idx="minor">
-            <a:schemeClr val="lt1"/>
-          </a:fontRef>
-        </p:style>
-        <p:txBody>
-          <a:bodyPr rtlCol="0" anchor="ctr"/>
-          <a:lstStyle/>
-          <a:p>
-            <a:pPr algn="ctr"/>
-          </a:p>
-        </p:txBody>
-      </p:sp>
-      <p:sp>
-        <p:nvSpPr>
-          <p:cNvPr id="20" name="Oval 19"/>
-          <p:cNvSpPr/>
-          <p:nvPr/>
-        </p:nvSpPr>
-        <p:spPr>
-          <a:xfrm rot="180000">
-            <a:off x="8444823" y="1662953"/>
-            <a:ext cx="457200" cy="457200"/>
-          </a:xfrm>
-          <a:prstGeom prst="ellipse">
-            <a:avLst/>
-          </a:prstGeom>
-          <a:solidFill>
-            <a:srgbClr val="31662F"/>
-          </a:solidFill>
-          <a:ln>
-            <a:noFill/>
-          </a:ln>
-          <a:effectLst/>
-        </p:spPr>
-        <p:style>
-          <a:lnRef idx="1">
-            <a:schemeClr val="accent1"/>
-          </a:lnRef>
-          <a:fillRef idx="3">
-            <a:schemeClr val="accent1"/>
-          </a:fillRef>
-          <a:effectRef idx="2">
-            <a:schemeClr val="accent1"/>
-          </a:effectRef>
-          <a:fontRef idx="minor">
-            <a:schemeClr val="lt1"/>
-          </a:fontRef>
-        </p:style>
-        <p:txBody>
-          <a:bodyPr rtlCol="0" anchor="ctr"/>
-          <a:lstStyle/>
-          <a:p>
-            <a:pPr algn="ctr"/>
-          </a:p>
-        </p:txBody>
-      </p:sp>
-      <p:sp>
-        <p:nvSpPr>
-          <p:cNvPr id="21" name="Oval 20"/>
-          <p:cNvSpPr/>
-          <p:nvPr/>
-        </p:nvSpPr>
-        <p:spPr>
-          <a:xfrm rot="180000">
-            <a:off x="8593039" y="1912081"/>
-            <a:ext cx="457200" cy="457200"/>
-          </a:xfrm>
-          <a:prstGeom prst="ellipse">
-            <a:avLst/>
-          </a:prstGeom>
-          <a:solidFill>
-            <a:srgbClr val="31662F"/>
-          </a:solidFill>
-          <a:ln>
-            <a:noFill/>
-          </a:ln>
-          <a:effectLst/>
-        </p:spPr>
-        <p:style>
-          <a:lnRef idx="1">
-            <a:schemeClr val="accent1"/>
-          </a:lnRef>
-          <a:fillRef idx="3">
-            <a:schemeClr val="accent1"/>
-          </a:fillRef>
-          <a:effectRef idx="2">
-            <a:schemeClr val="accent1"/>
-          </a:effectRef>
-          <a:fontRef idx="minor">
-            <a:schemeClr val="lt1"/>
-          </a:fontRef>
-        </p:style>
-        <p:txBody>
-          <a:bodyPr rtlCol="0" anchor="ctr"/>
-          <a:lstStyle/>
-          <a:p>
-            <a:pPr algn="ctr"/>
-          </a:p>
-        </p:txBody>
-      </p:sp>
-      <p:sp>
-        <p:nvSpPr>
-          <p:cNvPr id="22" name="Oval 21"/>
-          <p:cNvSpPr/>
-          <p:nvPr/>
-        </p:nvSpPr>
-        <p:spPr>
-          <a:xfrm rot="180000">
-            <a:off x="8663211" y="2227541"/>
-            <a:ext cx="400050" cy="400050"/>
-          </a:xfrm>
-          <a:prstGeom prst="ellipse">
-            <a:avLst/>
-          </a:prstGeom>
-          <a:solidFill>
-            <a:srgbClr val="F3F1EA"/>
-          </a:solidFill>
-          <a:ln>
-            <a:noFill/>
-          </a:ln>
-          <a:effectLst/>
-        </p:spPr>
-        <p:style>
-          <a:lnRef idx="1">
-            <a:schemeClr val="accent1"/>
-          </a:lnRef>
-          <a:fillRef idx="3">
-            <a:schemeClr val="accent1"/>
-          </a:fillRef>
-          <a:effectRef idx="2">
-            <a:schemeClr val="accent1"/>
-          </a:effectRef>
-          <a:fontRef idx="minor">
-            <a:schemeClr val="lt1"/>
-          </a:fontRef>
-        </p:style>
-        <p:txBody>
-          <a:bodyPr rtlCol="0" anchor="ctr"/>
-          <a:lstStyle/>
-          <a:p>
-            <a:pPr algn="ctr"/>
-          </a:p>
-        </p:txBody>
-      </p:sp>
-      <p:sp>
-        <p:nvSpPr>
-          <p:cNvPr id="23" name="Oval 22"/>
-          <p:cNvSpPr/>
-          <p:nvPr/>
-        </p:nvSpPr>
-        <p:spPr>
-          <a:xfrm rot="180000">
-            <a:off x="8591855" y="2508506"/>
-            <a:ext cx="400050" cy="400050"/>
-          </a:xfrm>
-          <a:prstGeom prst="ellipse">
-            <a:avLst/>
-          </a:prstGeom>
-          <a:solidFill>
-            <a:srgbClr val="F3F1EA"/>
-          </a:solidFill>
-          <a:ln>
-            <a:noFill/>
-          </a:ln>
-          <a:effectLst/>
-        </p:spPr>
-        <p:style>
-          <a:lnRef idx="1">
-            <a:schemeClr val="accent1"/>
-          </a:lnRef>
-          <a:fillRef idx="3">
-            <a:schemeClr val="accent1"/>
-          </a:fillRef>
-          <a:effectRef idx="2">
-            <a:schemeClr val="accent1"/>
-          </a:effectRef>
-          <a:fontRef idx="minor">
-            <a:schemeClr val="lt1"/>
-          </a:fontRef>
-        </p:style>
-        <p:txBody>
-          <a:bodyPr rtlCol="0" anchor="ctr"/>
-          <a:lstStyle/>
-          <a:p>
-            <a:pPr algn="ctr"/>
-          </a:p>
-        </p:txBody>
-      </p:sp>
-      <p:sp>
-        <p:nvSpPr>
-          <p:cNvPr id="24" name="Oval 23"/>
-          <p:cNvSpPr/>
-          <p:nvPr/>
-        </p:nvSpPr>
-        <p:spPr>
-          <a:xfrm rot="180000">
-            <a:off x="8418410" y="2740778"/>
-            <a:ext cx="400050" cy="400050"/>
-          </a:xfrm>
-          <a:prstGeom prst="ellipse">
-            <a:avLst/>
-          </a:prstGeom>
-          <a:solidFill>
-            <a:srgbClr val="F3F1EA"/>
-          </a:solidFill>
-          <a:ln>
-            <a:noFill/>
-          </a:ln>
-          <a:effectLst/>
-        </p:spPr>
-        <p:style>
-          <a:lnRef idx="1">
-            <a:schemeClr val="accent1"/>
-          </a:lnRef>
-          <a:fillRef idx="3">
-            <a:schemeClr val="accent1"/>
-          </a:fillRef>
-          <a:effectRef idx="2">
-            <a:schemeClr val="accent1"/>
-          </a:effectRef>
-          <a:fontRef idx="minor">
-            <a:schemeClr val="lt1"/>
-          </a:fontRef>
-        </p:style>
-        <p:txBody>
-          <a:bodyPr rtlCol="0" anchor="ctr"/>
-          <a:lstStyle/>
-          <a:p>
-            <a:pPr algn="ctr"/>
-          </a:p>
-        </p:txBody>
-      </p:sp>
-      <p:sp>
-        <p:nvSpPr>
-          <p:cNvPr id="25" name="Oval 24"/>
-          <p:cNvSpPr/>
-          <p:nvPr/>
-        </p:nvSpPr>
-        <p:spPr>
-          <a:xfrm rot="180000">
-            <a:off x="8169281" y="2888994"/>
-            <a:ext cx="400050" cy="400050"/>
-          </a:xfrm>
-          <a:prstGeom prst="ellipse">
-            <a:avLst/>
-          </a:prstGeom>
-          <a:solidFill>
-            <a:srgbClr val="F3F1EA"/>
-          </a:solidFill>
-          <a:ln>
-            <a:noFill/>
-          </a:ln>
-          <a:effectLst/>
-        </p:spPr>
-        <p:style>
-          <a:lnRef idx="1">
-            <a:schemeClr val="accent1"/>
-          </a:lnRef>
-          <a:fillRef idx="3">
-            <a:schemeClr val="accent1"/>
-          </a:fillRef>
-          <a:effectRef idx="2">
-            <a:schemeClr val="accent1"/>
-          </a:effectRef>
-          <a:fontRef idx="minor">
-            <a:schemeClr val="lt1"/>
-          </a:fontRef>
-        </p:style>
-        <p:txBody>
-          <a:bodyPr rtlCol="0" anchor="ctr"/>
-          <a:lstStyle/>
-          <a:p>
-            <a:pPr algn="ctr"/>
-          </a:p>
-        </p:txBody>
-      </p:sp>
-      <p:sp>
-        <p:nvSpPr>
-          <p:cNvPr id="26" name="Oval 25"/>
-          <p:cNvSpPr/>
-          <p:nvPr/>
-        </p:nvSpPr>
-        <p:spPr>
-          <a:xfrm rot="180000">
-            <a:off x="7882396" y="2930590"/>
-            <a:ext cx="400050" cy="400050"/>
-          </a:xfrm>
-          <a:prstGeom prst="ellipse">
-            <a:avLst/>
-          </a:prstGeom>
-          <a:solidFill>
-            <a:srgbClr val="F3F1EA"/>
-          </a:solidFill>
-          <a:ln>
-            <a:noFill/>
-          </a:ln>
-          <a:effectLst/>
-        </p:spPr>
-        <p:style>
-          <a:lnRef idx="1">
-            <a:schemeClr val="accent1"/>
-          </a:lnRef>
-          <a:fillRef idx="3">
-            <a:schemeClr val="accent1"/>
-          </a:fillRef>
-          <a:effectRef idx="2">
-            <a:schemeClr val="accent1"/>
-          </a:effectRef>
-          <a:fontRef idx="minor">
-            <a:schemeClr val="lt1"/>
-          </a:fontRef>
-        </p:style>
-        <p:txBody>
-          <a:bodyPr rtlCol="0" anchor="ctr"/>
-          <a:lstStyle/>
-          <a:p>
-            <a:pPr algn="ctr"/>
-          </a:p>
-        </p:txBody>
-      </p:sp>
-      <p:sp>
-        <p:nvSpPr>
-          <p:cNvPr id="27" name="Oval 26"/>
-          <p:cNvSpPr/>
-          <p:nvPr/>
-        </p:nvSpPr>
-        <p:spPr>
-          <a:xfrm rot="180000">
-            <a:off x="7601431" y="2859234"/>
-            <a:ext cx="400050" cy="400050"/>
-          </a:xfrm>
-          <a:prstGeom prst="ellipse">
-            <a:avLst/>
-          </a:prstGeom>
-          <a:solidFill>
-            <a:srgbClr val="F3F1EA"/>
-          </a:solidFill>
-          <a:ln>
-            <a:noFill/>
-          </a:ln>
-          <a:effectLst/>
-        </p:spPr>
-        <p:style>
-          <a:lnRef idx="1">
-            <a:schemeClr val="accent1"/>
-          </a:lnRef>
-          <a:fillRef idx="3">
-            <a:schemeClr val="accent1"/>
-          </a:fillRef>
-          <a:effectRef idx="2">
-            <a:schemeClr val="accent1"/>
-          </a:effectRef>
-          <a:fontRef idx="minor">
-            <a:schemeClr val="lt1"/>
-          </a:fontRef>
-        </p:style>
-        <p:txBody>
-          <a:bodyPr rtlCol="0" anchor="ctr"/>
-          <a:lstStyle/>
-          <a:p>
-            <a:pPr algn="ctr"/>
-          </a:p>
-        </p:txBody>
-      </p:sp>
-      <p:sp>
-        <p:nvSpPr>
-          <p:cNvPr id="28" name="Oval 27"/>
-          <p:cNvSpPr/>
-          <p:nvPr/>
-        </p:nvSpPr>
-        <p:spPr>
-          <a:xfrm rot="180000">
-            <a:off x="7369159" y="2685789"/>
-            <a:ext cx="400050" cy="400050"/>
-          </a:xfrm>
-          <a:prstGeom prst="ellipse">
-            <a:avLst/>
-          </a:prstGeom>
-          <a:solidFill>
-            <a:srgbClr val="F3F1EA"/>
-          </a:solidFill>
-          <a:ln>
-            <a:noFill/>
-          </a:ln>
-          <a:effectLst/>
-        </p:spPr>
-        <p:style>
-          <a:lnRef idx="1">
-            <a:schemeClr val="accent1"/>
-          </a:lnRef>
-          <a:fillRef idx="3">
-            <a:schemeClr val="accent1"/>
-          </a:fillRef>
-          <a:effectRef idx="2">
-            <a:schemeClr val="accent1"/>
-          </a:effectRef>
-          <a:fontRef idx="minor">
-            <a:schemeClr val="lt1"/>
-          </a:fontRef>
-        </p:style>
-        <p:txBody>
-          <a:bodyPr rtlCol="0" anchor="ctr"/>
-          <a:lstStyle/>
-          <a:p>
-            <a:pPr algn="ctr"/>
-          </a:p>
-        </p:txBody>
-      </p:sp>
-      <p:sp>
-        <p:nvSpPr>
-          <p:cNvPr id="29" name="Oval 28"/>
-          <p:cNvSpPr/>
-          <p:nvPr/>
-        </p:nvSpPr>
-        <p:spPr>
-          <a:xfrm rot="180000">
-            <a:off x="7220943" y="2436660"/>
-            <a:ext cx="400050" cy="400050"/>
-          </a:xfrm>
-          <a:prstGeom prst="ellipse">
-            <a:avLst/>
-          </a:prstGeom>
-          <a:solidFill>
-            <a:srgbClr val="F3F1EA"/>
-          </a:solidFill>
-          <a:ln>
-            <a:noFill/>
-          </a:ln>
-          <a:effectLst/>
-        </p:spPr>
-        <p:style>
-          <a:lnRef idx="1">
-            <a:schemeClr val="accent1"/>
-          </a:lnRef>
-          <a:fillRef idx="3">
-            <a:schemeClr val="accent1"/>
-          </a:fillRef>
-          <a:effectRef idx="2">
-            <a:schemeClr val="accent1"/>
-          </a:effectRef>
-          <a:fontRef idx="minor">
-            <a:schemeClr val="lt1"/>
-          </a:fontRef>
-        </p:style>
-        <p:txBody>
-          <a:bodyPr rtlCol="0" anchor="ctr"/>
-          <a:lstStyle/>
-          <a:p>
-            <a:pPr algn="ctr"/>
-          </a:p>
-        </p:txBody>
-      </p:sp>
-      <p:sp>
-        <p:nvSpPr>
-          <p:cNvPr id="30" name="Oval 29"/>
-          <p:cNvSpPr/>
-          <p:nvPr/>
-        </p:nvSpPr>
-        <p:spPr>
-          <a:xfrm rot="180000">
-            <a:off x="7179347" y="2149775"/>
-            <a:ext cx="400050" cy="400050"/>
-          </a:xfrm>
-          <a:prstGeom prst="ellipse">
-            <a:avLst/>
-          </a:prstGeom>
-          <a:solidFill>
-            <a:srgbClr val="F3F1EA"/>
-          </a:solidFill>
-          <a:ln>
-            <a:noFill/>
-          </a:ln>
-          <a:effectLst/>
-        </p:spPr>
-        <p:style>
-          <a:lnRef idx="1">
-            <a:schemeClr val="accent1"/>
-          </a:lnRef>
-          <a:fillRef idx="3">
-            <a:schemeClr val="accent1"/>
-          </a:fillRef>
-          <a:effectRef idx="2">
-            <a:schemeClr val="accent1"/>
-          </a:effectRef>
-          <a:fontRef idx="minor">
-            <a:schemeClr val="lt1"/>
-          </a:fontRef>
-        </p:style>
-        <p:txBody>
-          <a:bodyPr rtlCol="0" anchor="ctr"/>
-          <a:lstStyle/>
-          <a:p>
-            <a:pPr algn="ctr"/>
-          </a:p>
-        </p:txBody>
-      </p:sp>
-      <p:sp>
-        <p:nvSpPr>
-          <p:cNvPr id="31" name="Oval 30"/>
-          <p:cNvSpPr/>
-          <p:nvPr/>
-        </p:nvSpPr>
-        <p:spPr>
-          <a:xfrm rot="180000">
-            <a:off x="7250703" y="1868810"/>
-            <a:ext cx="400050" cy="400050"/>
-          </a:xfrm>
-          <a:prstGeom prst="ellipse">
-            <a:avLst/>
-          </a:prstGeom>
-          <a:solidFill>
-            <a:srgbClr val="F3F1EA"/>
-          </a:solidFill>
-          <a:ln>
-            <a:noFill/>
-          </a:ln>
-          <a:effectLst/>
-        </p:spPr>
-        <p:style>
-          <a:lnRef idx="1">
-            <a:schemeClr val="accent1"/>
-          </a:lnRef>
-          <a:fillRef idx="3">
-            <a:schemeClr val="accent1"/>
-          </a:fillRef>
-          <a:effectRef idx="2">
-            <a:schemeClr val="accent1"/>
-          </a:effectRef>
-          <a:fontRef idx="minor">
-            <a:schemeClr val="lt1"/>
-          </a:fontRef>
-        </p:style>
-        <p:txBody>
-          <a:bodyPr rtlCol="0" anchor="ctr"/>
-          <a:lstStyle/>
-          <a:p>
-            <a:pPr algn="ctr"/>
-          </a:p>
-        </p:txBody>
-      </p:sp>
-      <p:sp>
-        <p:nvSpPr>
-          <p:cNvPr id="32" name="Oval 31"/>
-          <p:cNvSpPr/>
-          <p:nvPr/>
-        </p:nvSpPr>
-        <p:spPr>
-          <a:xfrm rot="180000">
-            <a:off x="7424148" y="1636539"/>
-            <a:ext cx="400050" cy="400050"/>
-          </a:xfrm>
-          <a:prstGeom prst="ellipse">
-            <a:avLst/>
-          </a:prstGeom>
-          <a:solidFill>
-            <a:srgbClr val="F3F1EA"/>
-          </a:solidFill>
-          <a:ln>
-            <a:noFill/>
-          </a:ln>
-          <a:effectLst/>
-        </p:spPr>
-        <p:style>
-          <a:lnRef idx="1">
-            <a:schemeClr val="accent1"/>
-          </a:lnRef>
-          <a:fillRef idx="3">
-            <a:schemeClr val="accent1"/>
-          </a:fillRef>
-          <a:effectRef idx="2">
-            <a:schemeClr val="accent1"/>
-          </a:effectRef>
-          <a:fontRef idx="minor">
-            <a:schemeClr val="lt1"/>
-          </a:fontRef>
-        </p:style>
-        <p:txBody>
-          <a:bodyPr rtlCol="0" anchor="ctr"/>
-          <a:lstStyle/>
-          <a:p>
-            <a:pPr algn="ctr"/>
-          </a:p>
-        </p:txBody>
-      </p:sp>
-      <p:sp>
-        <p:nvSpPr>
-          <p:cNvPr id="33" name="Oval 32"/>
-          <p:cNvSpPr/>
-          <p:nvPr/>
-        </p:nvSpPr>
-        <p:spPr>
-          <a:xfrm rot="180000">
-            <a:off x="7673277" y="1488323"/>
-            <a:ext cx="400050" cy="400050"/>
-          </a:xfrm>
-          <a:prstGeom prst="ellipse">
-            <a:avLst/>
-          </a:prstGeom>
-          <a:solidFill>
-            <a:srgbClr val="F3F1EA"/>
-          </a:solidFill>
-          <a:ln>
-            <a:noFill/>
-          </a:ln>
-          <a:effectLst/>
-        </p:spPr>
-        <p:style>
-          <a:lnRef idx="1">
-            <a:schemeClr val="accent1"/>
-          </a:lnRef>
-          <a:fillRef idx="3">
-            <a:schemeClr val="accent1"/>
-          </a:fillRef>
-          <a:effectRef idx="2">
-            <a:schemeClr val="accent1"/>
-          </a:effectRef>
-          <a:fontRef idx="minor">
-            <a:schemeClr val="lt1"/>
-          </a:fontRef>
-        </p:style>
-        <p:txBody>
-          <a:bodyPr rtlCol="0" anchor="ctr"/>
-          <a:lstStyle/>
-          <a:p>
-            <a:pPr algn="ctr"/>
-          </a:p>
-        </p:txBody>
-      </p:sp>
-      <p:sp>
-        <p:nvSpPr>
-          <p:cNvPr id="34" name="Oval 33"/>
-          <p:cNvSpPr/>
-          <p:nvPr/>
-        </p:nvSpPr>
-        <p:spPr>
-          <a:xfrm rot="180000">
-            <a:off x="7960162" y="1446726"/>
-            <a:ext cx="400050" cy="400050"/>
-          </a:xfrm>
-          <a:prstGeom prst="ellipse">
-            <a:avLst/>
-          </a:prstGeom>
-          <a:solidFill>
-            <a:srgbClr val="F3F1EA"/>
-          </a:solidFill>
-          <a:ln>
-            <a:noFill/>
-          </a:ln>
-          <a:effectLst/>
-        </p:spPr>
-        <p:style>
-          <a:lnRef idx="1">
-            <a:schemeClr val="accent1"/>
-          </a:lnRef>
-          <a:fillRef idx="3">
-            <a:schemeClr val="accent1"/>
-          </a:fillRef>
-          <a:effectRef idx="2">
-            <a:schemeClr val="accent1"/>
-          </a:effectRef>
-          <a:fontRef idx="minor">
-            <a:schemeClr val="lt1"/>
-          </a:fontRef>
-        </p:style>
-        <p:txBody>
-          <a:bodyPr rtlCol="0" anchor="ctr"/>
-          <a:lstStyle/>
-          <a:p>
-            <a:pPr algn="ctr"/>
-          </a:p>
-        </p:txBody>
-      </p:sp>
-      <p:sp>
-        <p:nvSpPr>
-          <p:cNvPr id="35" name="Oval 34"/>
-          <p:cNvSpPr/>
-          <p:nvPr/>
-        </p:nvSpPr>
-        <p:spPr>
-          <a:xfrm rot="180000">
-            <a:off x="8241127" y="1518082"/>
-            <a:ext cx="400050" cy="400050"/>
-          </a:xfrm>
-          <a:prstGeom prst="ellipse">
-            <a:avLst/>
-          </a:prstGeom>
-          <a:solidFill>
-            <a:srgbClr val="F3F1EA"/>
-          </a:solidFill>
-          <a:ln>
-            <a:noFill/>
-          </a:ln>
-          <a:effectLst/>
-        </p:spPr>
-        <p:style>
-          <a:lnRef idx="1">
-            <a:schemeClr val="accent1"/>
-          </a:lnRef>
-          <a:fillRef idx="3">
-            <a:schemeClr val="accent1"/>
-          </a:fillRef>
-          <a:effectRef idx="2">
-            <a:schemeClr val="accent1"/>
-          </a:effectRef>
-          <a:fontRef idx="minor">
-            <a:schemeClr val="lt1"/>
-          </a:fontRef>
-        </p:style>
-        <p:txBody>
-          <a:bodyPr rtlCol="0" anchor="ctr"/>
-          <a:lstStyle/>
-          <a:p>
-            <a:pPr algn="ctr"/>
-          </a:p>
-        </p:txBody>
-      </p:sp>
-      <p:sp>
-        <p:nvSpPr>
-          <p:cNvPr id="36" name="Oval 35"/>
-          <p:cNvSpPr/>
-          <p:nvPr/>
-        </p:nvSpPr>
-        <p:spPr>
-          <a:xfrm rot="180000">
-            <a:off x="8473398" y="1691528"/>
-            <a:ext cx="400050" cy="400050"/>
-          </a:xfrm>
-          <a:prstGeom prst="ellipse">
-            <a:avLst/>
-          </a:prstGeom>
-          <a:solidFill>
-            <a:srgbClr val="F3F1EA"/>
-          </a:solidFill>
-          <a:ln>
-            <a:noFill/>
-          </a:ln>
-          <a:effectLst/>
-        </p:spPr>
-        <p:style>
-          <a:lnRef idx="1">
-            <a:schemeClr val="accent1"/>
-          </a:lnRef>
-          <a:fillRef idx="3">
-            <a:schemeClr val="accent1"/>
-          </a:fillRef>
-          <a:effectRef idx="2">
-            <a:schemeClr val="accent1"/>
-          </a:effectRef>
-          <a:fontRef idx="minor">
-            <a:schemeClr val="lt1"/>
-          </a:fontRef>
-        </p:style>
-        <p:txBody>
-          <a:bodyPr rtlCol="0" anchor="ctr"/>
-          <a:lstStyle/>
-          <a:p>
-            <a:pPr algn="ctr"/>
-          </a:p>
-        </p:txBody>
-      </p:sp>
-      <p:sp>
-        <p:nvSpPr>
-          <p:cNvPr id="37" name="Oval 36"/>
-          <p:cNvSpPr/>
-          <p:nvPr/>
-        </p:nvSpPr>
-        <p:spPr>
-          <a:xfrm rot="180000">
-            <a:off x="8621614" y="1940656"/>
-            <a:ext cx="400050" cy="400050"/>
-          </a:xfrm>
-          <a:prstGeom prst="ellipse">
-            <a:avLst/>
-          </a:prstGeom>
-          <a:solidFill>
-            <a:srgbClr val="F3F1EA"/>
-          </a:solidFill>
-          <a:ln>
-            <a:noFill/>
-          </a:ln>
-          <a:effectLst/>
-        </p:spPr>
-        <p:style>
-          <a:lnRef idx="1">
-            <a:schemeClr val="accent1"/>
-          </a:lnRef>
-          <a:fillRef idx="3">
-            <a:schemeClr val="accent1"/>
-          </a:fillRef>
-          <a:effectRef idx="2">
-            <a:schemeClr val="accent1"/>
-          </a:effectRef>
-          <a:fontRef idx="minor">
-            <a:schemeClr val="lt1"/>
-          </a:fontRef>
-        </p:style>
-        <p:txBody>
-          <a:bodyPr rtlCol="0" anchor="ctr"/>
-          <a:lstStyle/>
-          <a:p>
-            <a:pPr algn="ctr"/>
-          </a:p>
-        </p:txBody>
-      </p:sp>
-      <p:sp>
-        <p:nvSpPr>
-          <p:cNvPr id="38" name="Oval 37"/>
-          <p:cNvSpPr/>
-          <p:nvPr/>
-        </p:nvSpPr>
-        <p:spPr>
-          <a:xfrm rot="180000">
-            <a:off x="7397404" y="1664783"/>
-            <a:ext cx="1447800" cy="1447800"/>
-          </a:xfrm>
-          <a:prstGeom prst="ellipse">
-            <a:avLst/>
-          </a:prstGeom>
-          <a:solidFill>
-            <a:srgbClr val="F3F1EA"/>
-          </a:solidFill>
-          <a:ln>
-            <a:noFill/>
-          </a:ln>
-          <a:effectLst/>
-        </p:spPr>
-        <p:style>
-          <a:lnRef idx="1">
-            <a:schemeClr val="accent1"/>
-          </a:lnRef>
-          <a:fillRef idx="3">
-            <a:schemeClr val="accent1"/>
-          </a:fillRef>
-          <a:effectRef idx="2">
-            <a:schemeClr val="accent1"/>
-          </a:effectRef>
-          <a:fontRef idx="minor">
-            <a:schemeClr val="lt1"/>
-          </a:fontRef>
-        </p:style>
-        <p:txBody>
-          <a:bodyPr rtlCol="0" anchor="ctr"/>
-          <a:lstStyle/>
-          <a:p>
-            <a:pPr algn="ctr"/>
+          <a:noFill/>
+        </p:spPr>
+        <p:txBody>
+          <a:bodyPr wrap="square" lIns="0" rIns="0" tIns="0" bIns="0" anchor="t">
+            <a:spAutoFit/>
+          </a:bodyPr>
+          <a:lstStyle/>
+          <a:p>
+            <a:pPr algn="l">
+              <a:lnSpc>
+                <a:spcPct val="115000"/>
+              </a:lnSpc>
+            </a:pPr>
+            <a:r>
+              <a:rPr sz="2200" b="0" i="0">
+                <a:solidFill>
+                  <a:srgbClr val="333130"/>
+                </a:solidFill>
+                <a:latin typeface="Source Sans 3"/>
+              </a:rPr>
+              <a:t>What they are known for</a:t>
+            </a:r>
           </a:p>
         </p:txBody>
       </p:sp>
       <p:pic>
         <p:nvPicPr>
-          <p:cNvPr id="39" name="Picture 38" descr="foundation-logo-color.png"/>
+          <p:cNvPr id="20" name="Picture 19" descr="foundation-logo-color.png"/>
           <p:cNvPicPr>
             <a:picLocks noChangeAspect="1"/>
           </p:cNvPicPr>
           <p:nvPr/>
         </p:nvPicPr>
         <p:blipFill>
-          <a:blip r:embed="rId3"/>
+          <a:blip r:embed="rId7"/>
           <a:stretch>
             <a:fillRect/>
           </a:stretch>
         </p:blipFill>
         <p:spPr>
-          <a:xfrm rot="180000">
-            <a:off x="7597429" y="1917689"/>
-            <a:ext cx="1047750" cy="941987"/>
+          <a:xfrm>
+            <a:off x="8382000" y="11421282"/>
+            <a:ext cx="857250" cy="770717"/>
           </a:xfrm>
           <a:prstGeom prst="rect">
             <a:avLst/>
           </a:prstGeom>
         </p:spPr>
       </p:pic>
-      <p:sp>
-        <p:nvSpPr>
-          <p:cNvPr id="40" name="TextBox 39"/>
-          <p:cNvSpPr txBox="1"/>
-          <p:nvPr/>
-        </p:nvSpPr>
-        <p:spPr>
-          <a:xfrm rot="180000">
-            <a:off x="1571357" y="5382865"/>
-            <a:ext cx="7239000" cy="285750"/>
-          </a:xfrm>
-          <a:prstGeom prst="rect">
-            <a:avLst/>
-          </a:prstGeom>
-          <a:noFill/>
-        </p:spPr>
-        <p:txBody>
-          <a:bodyPr wrap="square" lIns="0" rIns="0" tIns="0" bIns="0" anchor="t">
-            <a:spAutoFit/>
-          </a:bodyPr>
-          <a:lstStyle/>
-          <a:p>
-            <a:pPr algn="l">
-              <a:lnSpc>
-                <a:spcPct val="120000"/>
-              </a:lnSpc>
-            </a:pPr>
-            <a:r>
-              <a:rPr sz="2000" b="1" i="0" spc="200">
-                <a:solidFill>
-                  <a:srgbClr val="31662F"/>
-                </a:solidFill>
-                <a:latin typeface="Montserrat"/>
-              </a:rPr>
-              <a:t>BASED IN</a:t>
-            </a:r>
-          </a:p>
-        </p:txBody>
-      </p:sp>
-      <p:sp>
-        <p:nvSpPr>
-          <p:cNvPr id="41" name="TextBox 40"/>
-          <p:cNvSpPr txBox="1"/>
-          <p:nvPr/>
-        </p:nvSpPr>
-        <p:spPr>
-          <a:xfrm rot="180000">
-            <a:off x="1552912" y="5668132"/>
-            <a:ext cx="7239000" cy="419100"/>
-          </a:xfrm>
-          <a:prstGeom prst="rect">
-            <a:avLst/>
-          </a:prstGeom>
-          <a:noFill/>
-        </p:spPr>
-        <p:txBody>
-          <a:bodyPr wrap="square" lIns="0" rIns="0" tIns="0" bIns="0" anchor="t">
-            <a:spAutoFit/>
-          </a:bodyPr>
-          <a:lstStyle/>
-          <a:p>
-            <a:pPr algn="l">
-              <a:lnSpc>
-                <a:spcPct val="120000"/>
-              </a:lnSpc>
-            </a:pPr>
-            <a:r>
-              <a:rPr sz="3000" b="0" i="0">
-                <a:solidFill>
-                  <a:srgbClr val="333130"/>
-                </a:solidFill>
-                <a:latin typeface="Source Sans 3"/>
-              </a:rPr>
-              <a:t>[COPY: Allison]</a:t>
-            </a:r>
-          </a:p>
-        </p:txBody>
-      </p:sp>
-      <p:sp>
-        <p:nvSpPr>
-          <p:cNvPr id="42" name="TextBox 41"/>
-          <p:cNvSpPr txBox="1"/>
-          <p:nvPr/>
-        </p:nvSpPr>
-        <p:spPr>
-          <a:xfrm rot="180000">
-            <a:off x="1521507" y="6334059"/>
-            <a:ext cx="7239000" cy="285750"/>
-          </a:xfrm>
-          <a:prstGeom prst="rect">
-            <a:avLst/>
-          </a:prstGeom>
-          <a:noFill/>
-        </p:spPr>
-        <p:txBody>
-          <a:bodyPr wrap="square" lIns="0" rIns="0" tIns="0" bIns="0" anchor="t">
-            <a:spAutoFit/>
-          </a:bodyPr>
-          <a:lstStyle/>
-          <a:p>
-            <a:pPr algn="l">
-              <a:lnSpc>
-                <a:spcPct val="120000"/>
-              </a:lnSpc>
-            </a:pPr>
-            <a:r>
-              <a:rPr sz="2000" b="1" i="0" spc="200">
-                <a:solidFill>
-                  <a:srgbClr val="31662F"/>
-                </a:solidFill>
-                <a:latin typeface="Montserrat"/>
-              </a:rPr>
-              <a:t>TEACHING SINCE</a:t>
-            </a:r>
-          </a:p>
-        </p:txBody>
-      </p:sp>
-      <p:sp>
-        <p:nvSpPr>
-          <p:cNvPr id="43" name="TextBox 42"/>
-          <p:cNvSpPr txBox="1"/>
-          <p:nvPr/>
-        </p:nvSpPr>
-        <p:spPr>
-          <a:xfrm rot="180000">
-            <a:off x="1503063" y="6619326"/>
-            <a:ext cx="7239000" cy="419100"/>
-          </a:xfrm>
-          <a:prstGeom prst="rect">
-            <a:avLst/>
-          </a:prstGeom>
-          <a:noFill/>
-        </p:spPr>
-        <p:txBody>
-          <a:bodyPr wrap="square" lIns="0" rIns="0" tIns="0" bIns="0" anchor="t">
-            <a:spAutoFit/>
-          </a:bodyPr>
-          <a:lstStyle/>
-          <a:p>
-            <a:pPr algn="l">
-              <a:lnSpc>
-                <a:spcPct val="120000"/>
-              </a:lnSpc>
-            </a:pPr>
-            <a:r>
-              <a:rPr sz="3000" b="0" i="0">
-                <a:solidFill>
-                  <a:srgbClr val="333130"/>
-                </a:solidFill>
-                <a:latin typeface="Source Sans 3"/>
-              </a:rPr>
-              <a:t>[COPY: Allison]</a:t>
-            </a:r>
-          </a:p>
-        </p:txBody>
-      </p:sp>
-      <p:sp>
-        <p:nvSpPr>
-          <p:cNvPr id="44" name="TextBox 43"/>
-          <p:cNvSpPr txBox="1"/>
-          <p:nvPr/>
-        </p:nvSpPr>
-        <p:spPr>
-          <a:xfrm rot="180000">
-            <a:off x="1471657" y="7285254"/>
-            <a:ext cx="7239000" cy="285750"/>
-          </a:xfrm>
-          <a:prstGeom prst="rect">
-            <a:avLst/>
-          </a:prstGeom>
-          <a:noFill/>
-        </p:spPr>
-        <p:txBody>
-          <a:bodyPr wrap="square" lIns="0" rIns="0" tIns="0" bIns="0" anchor="t">
-            <a:spAutoFit/>
-          </a:bodyPr>
-          <a:lstStyle/>
-          <a:p>
-            <a:pPr algn="l">
-              <a:lnSpc>
-                <a:spcPct val="120000"/>
-              </a:lnSpc>
-            </a:pPr>
-            <a:r>
-              <a:rPr sz="2000" b="1" i="0" spc="200">
-                <a:solidFill>
-                  <a:srgbClr val="31662F"/>
-                </a:solidFill>
-                <a:latin typeface="Montserrat"/>
-              </a:rPr>
-              <a:t>ASK ME ABOUT</a:t>
-            </a:r>
-          </a:p>
-        </p:txBody>
-      </p:sp>
-      <p:sp>
-        <p:nvSpPr>
-          <p:cNvPr id="45" name="TextBox 44"/>
-          <p:cNvSpPr txBox="1"/>
-          <p:nvPr/>
-        </p:nvSpPr>
-        <p:spPr>
-          <a:xfrm rot="180000">
-            <a:off x="1453213" y="7570521"/>
-            <a:ext cx="7239000" cy="419100"/>
-          </a:xfrm>
-          <a:prstGeom prst="rect">
-            <a:avLst/>
-          </a:prstGeom>
-          <a:noFill/>
-        </p:spPr>
-        <p:txBody>
-          <a:bodyPr wrap="square" lIns="0" rIns="0" tIns="0" bIns="0" anchor="t">
-            <a:spAutoFit/>
-          </a:bodyPr>
-          <a:lstStyle/>
-          <a:p>
-            <a:pPr algn="l">
-              <a:lnSpc>
-                <a:spcPct val="120000"/>
-              </a:lnSpc>
-            </a:pPr>
-            <a:r>
-              <a:rPr sz="3000" b="0" i="0">
-                <a:solidFill>
-                  <a:srgbClr val="333130"/>
-                </a:solidFill>
-                <a:latin typeface="Source Sans 3"/>
-              </a:rPr>
-              <a:t>[COPY: Allison]</a:t>
-            </a:r>
-          </a:p>
-        </p:txBody>
-      </p:sp>
-      <p:sp>
-        <p:nvSpPr>
-          <p:cNvPr id="46" name="TextBox 45"/>
-          <p:cNvSpPr txBox="1"/>
-          <p:nvPr/>
-        </p:nvSpPr>
-        <p:spPr>
-          <a:xfrm rot="180000">
-            <a:off x="1421807" y="8236448"/>
-            <a:ext cx="7239000" cy="285750"/>
-          </a:xfrm>
-          <a:prstGeom prst="rect">
-            <a:avLst/>
-          </a:prstGeom>
-          <a:noFill/>
-        </p:spPr>
-        <p:txBody>
-          <a:bodyPr wrap="square" lIns="0" rIns="0" tIns="0" bIns="0" anchor="t">
-            <a:spAutoFit/>
-          </a:bodyPr>
-          <a:lstStyle/>
-          <a:p>
-            <a:pPr algn="l">
-              <a:lnSpc>
-                <a:spcPct val="120000"/>
-              </a:lnSpc>
-            </a:pPr>
-            <a:r>
-              <a:rPr sz="2000" b="1" i="0" spc="200">
-                <a:solidFill>
-                  <a:srgbClr val="31662F"/>
-                </a:solidFill>
-                <a:latin typeface="Montserrat"/>
-              </a:rPr>
-              <a:t>FAVORITE ORGANISM</a:t>
-            </a:r>
-          </a:p>
-        </p:txBody>
-      </p:sp>
-      <p:sp>
-        <p:nvSpPr>
-          <p:cNvPr id="47" name="TextBox 46"/>
-          <p:cNvSpPr txBox="1"/>
-          <p:nvPr/>
-        </p:nvSpPr>
-        <p:spPr>
-          <a:xfrm rot="180000">
-            <a:off x="1403363" y="8521716"/>
-            <a:ext cx="7239000" cy="419100"/>
-          </a:xfrm>
-          <a:prstGeom prst="rect">
-            <a:avLst/>
-          </a:prstGeom>
-          <a:noFill/>
-        </p:spPr>
-        <p:txBody>
-          <a:bodyPr wrap="square" lIns="0" rIns="0" tIns="0" bIns="0" anchor="t">
-            <a:spAutoFit/>
-          </a:bodyPr>
-          <a:lstStyle/>
-          <a:p>
-            <a:pPr algn="l">
-              <a:lnSpc>
-                <a:spcPct val="120000"/>
-              </a:lnSpc>
-            </a:pPr>
-            <a:r>
-              <a:rPr sz="3000" b="0" i="0">
-                <a:solidFill>
-                  <a:srgbClr val="333130"/>
-                </a:solidFill>
-                <a:latin typeface="Source Sans 3"/>
-              </a:rPr>
-              <a:t>[COPY: Allison]</a:t>
-            </a:r>
-          </a:p>
-        </p:txBody>
-      </p:sp>
-      <p:sp>
-        <p:nvSpPr>
-          <p:cNvPr id="48" name="Freeform 47"/>
-          <p:cNvSpPr/>
-          <p:nvPr/>
-        </p:nvSpPr>
-        <p:spPr>
-          <a:xfrm rot="180000">
-            <a:off x="1334570" y="9520039"/>
-            <a:ext cx="7239000" cy="1047750"/>
-          </a:xfrm>
-          <a:custGeom>
-            <a:avLst/>
-            <a:gdLst/>
-            <a:ahLst/>
-            <a:cxnLst/>
-            <a:rect l="l" t="t" r="r" b="b"/>
-            <a:pathLst>
-              <a:path w="7239000" h="1047750">
-                <a:moveTo>
-                  <a:pt x="0" y="0"/>
-                </a:moveTo>
-                <a:lnTo>
-                  <a:pt x="7239000" y="0"/>
-                </a:lnTo>
-                <a:lnTo>
-                  <a:pt x="6953250" y="523875"/>
-                </a:lnTo>
-                <a:lnTo>
-                  <a:pt x="7239000" y="1047750"/>
-                </a:lnTo>
-                <a:lnTo>
-                  <a:pt x="0" y="1047750"/>
-                </a:lnTo>
-                <a:lnTo>
-                  <a:pt x="285750" y="523875"/>
-                </a:lnTo>
-                <a:close/>
-              </a:path>
-            </a:pathLst>
-          </a:custGeom>
-          <a:solidFill>
-            <a:srgbClr val="31662F"/>
-          </a:solidFill>
-          <a:ln>
-            <a:noFill/>
-          </a:ln>
-          <a:effectLst/>
-        </p:spPr>
-        <p:style>
-          <a:lnRef idx="1">
-            <a:schemeClr val="accent1"/>
-          </a:lnRef>
-          <a:fillRef idx="3">
-            <a:schemeClr val="accent1"/>
-          </a:fillRef>
-          <a:effectRef idx="2">
-            <a:schemeClr val="accent1"/>
-          </a:effectRef>
-          <a:fontRef idx="minor">
-            <a:schemeClr val="lt1"/>
-          </a:fontRef>
-        </p:style>
-        <p:txBody>
-          <a:bodyPr rtlCol="0" anchor="ctr"/>
-          <a:lstStyle/>
-          <a:p>
-            <a:pPr algn="ctr"/>
-          </a:p>
-        </p:txBody>
-      </p:sp>
-      <p:sp>
-        <p:nvSpPr>
-          <p:cNvPr id="49" name="TextBox 48"/>
-          <p:cNvSpPr txBox="1"/>
-          <p:nvPr/>
-        </p:nvSpPr>
-        <p:spPr>
-          <a:xfrm rot="180000">
-            <a:off x="1715570" y="9520039"/>
-            <a:ext cx="6477000" cy="1047750"/>
-          </a:xfrm>
-          <a:prstGeom prst="rect">
-            <a:avLst/>
-          </a:prstGeom>
-          <a:noFill/>
-        </p:spPr>
-        <p:txBody>
-          <a:bodyPr wrap="square" lIns="0" rIns="0" tIns="0" bIns="0" anchor="ctr">
-            <a:spAutoFit/>
-          </a:bodyPr>
-          <a:lstStyle/>
-          <a:p>
-            <a:pPr algn="ctr">
-              <a:lnSpc>
-                <a:spcPct val="120000"/>
-              </a:lnSpc>
-            </a:pPr>
-            <a:r>
-              <a:rPr sz="5000" b="1" i="0">
-                <a:solidFill>
-                  <a:srgbClr val="F3F1EA"/>
-                </a:solidFill>
-                <a:latin typeface="Montserrat"/>
-              </a:rPr>
-              <a:t>MENTOR NAME</a:t>
-            </a:r>
-          </a:p>
-        </p:txBody>
-      </p:sp>
-      <p:sp>
-        <p:nvSpPr>
-          <p:cNvPr id="50" name="Freeform 49"/>
-          <p:cNvSpPr/>
-          <p:nvPr/>
-        </p:nvSpPr>
-        <p:spPr>
-          <a:xfrm rot="180000">
-            <a:off x="1863697" y="10471430"/>
-            <a:ext cx="6096000" cy="762000"/>
-          </a:xfrm>
-          <a:custGeom>
-            <a:avLst/>
-            <a:gdLst/>
-            <a:ahLst/>
-            <a:cxnLst/>
-            <a:rect l="l" t="t" r="r" b="b"/>
-            <a:pathLst>
-              <a:path w="6096000" h="762000">
-                <a:moveTo>
-                  <a:pt x="0" y="0"/>
-                </a:moveTo>
-                <a:lnTo>
-                  <a:pt x="6096000" y="0"/>
-                </a:lnTo>
-                <a:lnTo>
-                  <a:pt x="5810250" y="381000"/>
-                </a:lnTo>
-                <a:lnTo>
-                  <a:pt x="6096000" y="762000"/>
-                </a:lnTo>
-                <a:lnTo>
-                  <a:pt x="0" y="762000"/>
-                </a:lnTo>
-                <a:lnTo>
-                  <a:pt x="285750" y="381000"/>
-                </a:lnTo>
-                <a:close/>
-              </a:path>
-            </a:pathLst>
-          </a:custGeom>
-          <a:solidFill>
-            <a:srgbClr val="1E3F1D"/>
-          </a:solidFill>
-          <a:ln>
-            <a:noFill/>
-          </a:ln>
-          <a:effectLst/>
-        </p:spPr>
-        <p:style>
-          <a:lnRef idx="1">
-            <a:schemeClr val="accent1"/>
-          </a:lnRef>
-          <a:fillRef idx="3">
-            <a:schemeClr val="accent1"/>
-          </a:fillRef>
-          <a:effectRef idx="2">
-            <a:schemeClr val="accent1"/>
-          </a:effectRef>
-          <a:fontRef idx="minor">
-            <a:schemeClr val="lt1"/>
-          </a:fontRef>
-        </p:style>
-        <p:txBody>
-          <a:bodyPr rtlCol="0" anchor="ctr"/>
-          <a:lstStyle/>
-          <a:p>
-            <a:pPr algn="ctr"/>
-          </a:p>
-        </p:txBody>
-      </p:sp>
-      <p:sp>
-        <p:nvSpPr>
-          <p:cNvPr id="51" name="TextBox 50"/>
-          <p:cNvSpPr txBox="1"/>
-          <p:nvPr/>
-        </p:nvSpPr>
-        <p:spPr>
-          <a:xfrm rot="180000">
-            <a:off x="2244697" y="10471430"/>
-            <a:ext cx="5334000" cy="762000"/>
-          </a:xfrm>
-          <a:prstGeom prst="rect">
-            <a:avLst/>
-          </a:prstGeom>
-          <a:noFill/>
-        </p:spPr>
-        <p:txBody>
-          <a:bodyPr wrap="square" lIns="0" rIns="0" tIns="0" bIns="0" anchor="ctr">
-            <a:spAutoFit/>
-          </a:bodyPr>
-          <a:lstStyle/>
-          <a:p>
-            <a:pPr algn="ctr">
-              <a:lnSpc>
-                <a:spcPct val="120000"/>
-              </a:lnSpc>
-            </a:pPr>
-            <a:r>
-              <a:rPr sz="2800" b="0" i="0">
-                <a:solidFill>
-                  <a:srgbClr val="B1BCB1"/>
-                </a:solidFill>
-                <a:latin typeface="Source Sans 3"/>
-              </a:rPr>
-              <a:t>Role</a:t>
-            </a:r>
-          </a:p>
-        </p:txBody>
-      </p:sp>
-      <p:sp>
-        <p:nvSpPr>
-          <p:cNvPr id="52" name="Rectangle 51"/>
-          <p:cNvSpPr/>
-          <p:nvPr/>
-        </p:nvSpPr>
-        <p:spPr>
-          <a:xfrm rot="180000">
-            <a:off x="669352" y="11622610"/>
-            <a:ext cx="8382000" cy="419100"/>
-          </a:xfrm>
-          <a:prstGeom prst="rect">
-            <a:avLst/>
-          </a:prstGeom>
-          <a:solidFill>
-            <a:srgbClr val="4C3634"/>
-          </a:solidFill>
-          <a:ln>
-            <a:noFill/>
-          </a:ln>
-          <a:effectLst/>
-        </p:spPr>
-        <p:style>
-          <a:lnRef idx="1">
-            <a:schemeClr val="accent1"/>
-          </a:lnRef>
-          <a:fillRef idx="3">
-            <a:schemeClr val="accent1"/>
-          </a:fillRef>
-          <a:effectRef idx="2">
-            <a:schemeClr val="accent1"/>
-          </a:effectRef>
-          <a:fontRef idx="minor">
-            <a:schemeClr val="lt1"/>
-          </a:fontRef>
-        </p:style>
-        <p:txBody>
-          <a:bodyPr rtlCol="0" anchor="ctr"/>
-          <a:lstStyle/>
-          <a:p>
-            <a:pPr algn="ctr"/>
-          </a:p>
-        </p:txBody>
-      </p:sp>
-      <p:sp>
-        <p:nvSpPr>
-          <p:cNvPr id="53" name="TextBox 52"/>
-          <p:cNvSpPr txBox="1"/>
-          <p:nvPr/>
-        </p:nvSpPr>
-        <p:spPr>
-          <a:xfrm rot="180000">
-            <a:off x="669352" y="11622610"/>
-            <a:ext cx="8382000" cy="419100"/>
-          </a:xfrm>
-          <a:prstGeom prst="rect">
-            <a:avLst/>
-          </a:prstGeom>
-          <a:noFill/>
-        </p:spPr>
-        <p:txBody>
-          <a:bodyPr wrap="square" lIns="0" rIns="0" tIns="0" bIns="0" anchor="ctr">
-            <a:spAutoFit/>
-          </a:bodyPr>
-          <a:lstStyle/>
-          <a:p>
-            <a:pPr algn="ctr">
-              <a:lnSpc>
-                <a:spcPct val="120000"/>
-              </a:lnSpc>
-            </a:pPr>
-            <a:r>
-              <a:rPr sz="1800" b="0" i="0">
-                <a:solidFill>
-                  <a:srgbClr val="F3F1EA"/>
-                </a:solidFill>
-                <a:latin typeface="Source Sans 3"/>
-              </a:rPr>
-              <a:t>soilfoodweb.com</a:t>
-            </a:r>
-          </a:p>
-        </p:txBody>
-      </p:sp>
-      <p:sp>
-        <p:nvSpPr>
-          <p:cNvPr id="54" name="TextBox 53"/>
-          <p:cNvSpPr txBox="1"/>
-          <p:nvPr/>
-        </p:nvSpPr>
-        <p:spPr>
-          <a:xfrm>
-            <a:off x="8191500" y="762000"/>
-            <a:ext cx="1333500" cy="285750"/>
-          </a:xfrm>
-          <a:prstGeom prst="rect">
-            <a:avLst/>
-          </a:prstGeom>
-          <a:noFill/>
-        </p:spPr>
-        <p:txBody>
-          <a:bodyPr wrap="square" lIns="0" rIns="0" tIns="0" bIns="0" anchor="t">
-            <a:spAutoFit/>
-          </a:bodyPr>
-          <a:lstStyle/>
-          <a:p>
-            <a:pPr algn="r">
-              <a:lnSpc>
-                <a:spcPct val="120000"/>
-              </a:lnSpc>
-            </a:pPr>
-            <a:r>
-              <a:rPr sz="2000" b="0" i="0">
-                <a:solidFill>
-                  <a:srgbClr val="F3F1EA">
-                    <a:alpha val="60000"/>
-                  </a:srgbClr>
-                </a:solidFill>
-                <a:latin typeface="Source Sans 3"/>
-              </a:rPr>
-              <a:t>1/5</a:t>
-            </a:r>
-          </a:p>
-        </p:txBody>
-      </p:sp>
     </p:spTree>
   </p:cSld>
   <p:clrMapOvr>
@@ -6144,16 +4510,64 @@
         <p:nvPr/>
       </p:nvGrpSpPr>
       <p:grpSpPr/>
-      <p:sp>
-        <p:nvSpPr>
-          <p:cNvPr id="2" name="TextBox 1"/>
+      <p:pic>
+        <p:nvPicPr>
+          <p:cNvPr id="2" name="Picture 1" descr="stones-stack.png"/>
+          <p:cNvPicPr>
+            <a:picLocks noChangeAspect="1"/>
+          </p:cNvPicPr>
+          <p:nvPr/>
+        </p:nvPicPr>
+        <p:blipFill>
+          <a:blip r:embed="rId3"/>
+          <a:stretch>
+            <a:fillRect/>
+          </a:stretch>
+        </p:blipFill>
+        <p:spPr>
+          <a:xfrm>
+            <a:off x="5619750" y="1428750"/>
+            <a:ext cx="3691701" cy="10668000"/>
+          </a:xfrm>
+          <a:prstGeom prst="rect">
+            <a:avLst/>
+          </a:prstGeom>
+        </p:spPr>
+      </p:pic>
+      <p:pic>
+        <p:nvPicPr>
+          <p:cNvPr id="3" name="Picture 2" descr="fern-green.png"/>
+          <p:cNvPicPr>
+            <a:picLocks noChangeAspect="1"/>
+          </p:cNvPicPr>
+          <p:nvPr/>
+        </p:nvPicPr>
+        <p:blipFill>
+          <a:blip r:embed="rId4"/>
+          <a:stretch>
+            <a:fillRect/>
+          </a:stretch>
+        </p:blipFill>
+        <p:spPr>
+          <a:xfrm rot="21120000">
+            <a:off x="-1143000" y="9525000"/>
+            <a:ext cx="7239000" cy="3731958"/>
+          </a:xfrm>
+          <a:prstGeom prst="rect">
+            <a:avLst/>
+          </a:prstGeom>
+        </p:spPr>
+      </p:pic>
+      <p:sp>
+        <p:nvSpPr>
+          <p:cNvPr id="4" name="TextBox 3"/>
           <p:cNvSpPr txBox="1"/>
           <p:nvPr/>
         </p:nvSpPr>
         <p:spPr>
           <a:xfrm>
             <a:off x="762000" y="2381250"/>
-            <a:ext cx="8382000" cy="1883365"/>
+            <a:ext cx="4953000" cy="2777422"/>
           </a:xfrm>
           <a:prstGeom prst="rect">
             <a:avLst/>
@@ -6185,178 +4599,7 @@
       </p:sp>
       <p:sp>
         <p:nvSpPr>
-          <p:cNvPr id="3" name="Rounded Rectangle 2"/>
-          <p:cNvSpPr/>
-          <p:nvPr/>
-        </p:nvSpPr>
-        <p:spPr>
-          <a:xfrm rot="21240000">
-            <a:off x="381000" y="6191250"/>
-            <a:ext cx="4953000" cy="6667500"/>
-          </a:xfrm>
-          <a:prstGeom prst="roundRect">
-            <a:avLst>
-              <a:gd name="adj" fmla="val 5384"/>
-            </a:avLst>
-          </a:prstGeom>
-          <a:pattFill prst="ltUpDiag">
-            <a:fgClr>
-              <a:srgbClr val="E8E2D4"/>
-            </a:fgClr>
-            <a:bgClr>
-              <a:srgbClr val="F3F1EA"/>
-            </a:bgClr>
-          </a:pattFill>
-          <a:ln>
-            <a:noFill/>
-          </a:ln>
-          <a:effectLst>
-            <a:outerShdw blurRad="228600" dist="76200" dir="5400000" algn="t" rotWithShape="0">
-              <a:srgbClr val="000000">
-                <a:alpha val="30000"/>
-              </a:srgbClr>
-            </a:outerShdw>
-          </a:effectLst>
-        </p:spPr>
-        <p:style>
-          <a:lnRef idx="1">
-            <a:schemeClr val="accent1"/>
-          </a:lnRef>
-          <a:fillRef idx="3">
-            <a:schemeClr val="accent1"/>
-          </a:fillRef>
-          <a:effectRef idx="2">
-            <a:schemeClr val="accent1"/>
-          </a:effectRef>
-          <a:fontRef idx="minor">
-            <a:schemeClr val="lt1"/>
-          </a:fontRef>
-        </p:style>
-        <p:txBody>
-          <a:bodyPr rtlCol="0" anchor="ctr"/>
-          <a:lstStyle/>
-          <a:p>
-            <a:pPr algn="ctr"/>
-          </a:p>
-        </p:txBody>
-      </p:sp>
-      <p:sp>
-        <p:nvSpPr>
-          <p:cNvPr id="4" name="Rounded Rectangle 3"/>
-          <p:cNvSpPr/>
-          <p:nvPr/>
-        </p:nvSpPr>
-        <p:spPr>
-          <a:xfrm>
-            <a:off x="1714500" y="6191250"/>
-            <a:ext cx="4953000" cy="6667500"/>
-          </a:xfrm>
-          <a:prstGeom prst="roundRect">
-            <a:avLst>
-              <a:gd name="adj" fmla="val 5384"/>
-            </a:avLst>
-          </a:prstGeom>
-          <a:pattFill prst="ltUpDiag">
-            <a:fgClr>
-              <a:srgbClr val="E8E2D4"/>
-            </a:fgClr>
-            <a:bgClr>
-              <a:srgbClr val="F3F1EA"/>
-            </a:bgClr>
-          </a:pattFill>
-          <a:ln>
-            <a:noFill/>
-          </a:ln>
-          <a:effectLst>
-            <a:outerShdw blurRad="228600" dist="76200" dir="5400000" algn="t" rotWithShape="0">
-              <a:srgbClr val="000000">
-                <a:alpha val="30000"/>
-              </a:srgbClr>
-            </a:outerShdw>
-          </a:effectLst>
-        </p:spPr>
-        <p:style>
-          <a:lnRef idx="1">
-            <a:schemeClr val="accent1"/>
-          </a:lnRef>
-          <a:fillRef idx="3">
-            <a:schemeClr val="accent1"/>
-          </a:fillRef>
-          <a:effectRef idx="2">
-            <a:schemeClr val="accent1"/>
-          </a:effectRef>
-          <a:fontRef idx="minor">
-            <a:schemeClr val="lt1"/>
-          </a:fontRef>
-        </p:style>
-        <p:txBody>
-          <a:bodyPr rtlCol="0" anchor="ctr"/>
-          <a:lstStyle/>
-          <a:p>
-            <a:pPr algn="ctr"/>
-          </a:p>
-        </p:txBody>
-      </p:sp>
-      <p:sp>
-        <p:nvSpPr>
-          <p:cNvPr id="5" name="Rounded Rectangle 4"/>
-          <p:cNvSpPr/>
-          <p:nvPr/>
-        </p:nvSpPr>
-        <p:spPr>
-          <a:xfrm rot="360000">
-            <a:off x="3048000" y="6191250"/>
-            <a:ext cx="4953000" cy="6667500"/>
-          </a:xfrm>
-          <a:prstGeom prst="roundRect">
-            <a:avLst>
-              <a:gd name="adj" fmla="val 5384"/>
-            </a:avLst>
-          </a:prstGeom>
-          <a:pattFill prst="ltUpDiag">
-            <a:fgClr>
-              <a:srgbClr val="E8E2D4"/>
-            </a:fgClr>
-            <a:bgClr>
-              <a:srgbClr val="F3F1EA"/>
-            </a:bgClr>
-          </a:pattFill>
-          <a:ln>
-            <a:noFill/>
-          </a:ln>
-          <a:effectLst>
-            <a:outerShdw blurRad="228600" dist="76200" dir="5400000" algn="t" rotWithShape="0">
-              <a:srgbClr val="000000">
-                <a:alpha val="30000"/>
-              </a:srgbClr>
-            </a:outerShdw>
-          </a:effectLst>
-        </p:spPr>
-        <p:style>
-          <a:lnRef idx="1">
-            <a:schemeClr val="accent1"/>
-          </a:lnRef>
-          <a:fillRef idx="3">
-            <a:schemeClr val="accent1"/>
-          </a:fillRef>
-          <a:effectRef idx="2">
-            <a:schemeClr val="accent1"/>
-          </a:effectRef>
-          <a:fontRef idx="minor">
-            <a:schemeClr val="lt1"/>
-          </a:fontRef>
-        </p:style>
-        <p:txBody>
-          <a:bodyPr rtlCol="0" anchor="ctr"/>
-          <a:lstStyle/>
-          <a:p>
-            <a:pPr algn="ctr"/>
-          </a:p>
-        </p:txBody>
-      </p:sp>
-      <p:sp>
-        <p:nvSpPr>
-          <p:cNvPr id="6" name="TextBox 5"/>
+          <p:cNvPr id="5" name="TextBox 4"/>
           <p:cNvSpPr txBox="1"/>
           <p:nvPr/>
         </p:nvSpPr>
